--- a/スライド/ch05.pptx
+++ b/スライド/ch05.pptx
@@ -614,13 +614,13 @@
           <a:lstStyle/>
           <a:p>
             <a:r>
-              <a:t>段階開示。①で「接線＝1 次で打ち切る」を強調。②は板書で x* を代入して見せると納得が早い。③で「母線数が出てこない」を言い切る。ここが GS との決定的な差。</a:t>
+              <a:t>前の 1 枚に ② を足しただけ。薄い段はまだ出していない段。</a:t>
             </a:r>
           </a:p>
           <a:p/>
           <a:p>
             <a:r>
-              <a:t>_class: sections</a:t>
+              <a:t>_class: figure-full</a:t>
             </a:r>
           </a:p>
         </p:txBody>
@@ -690,13 +690,13 @@
           <a:lstStyle/>
           <a:p>
             <a:r>
-              <a:t>段階開示。①で「接線＝1 次で打ち切る」を強調。②は板書で x* を代入して見せると納得が早い。③で「母線数が出てこない」を言い切る。ここが GS との決定的な差。</a:t>
+              <a:t>前の 1 枚に ③ を足しただけ。薄い段はまだ出していない段。</a:t>
             </a:r>
           </a:p>
           <a:p/>
           <a:p>
             <a:r>
-              <a:t>_class: sections</a:t>
+              <a:t>_class: figure-full</a:t>
             </a:r>
           </a:p>
         </p:txBody>
@@ -1146,7 +1146,7 @@
           <a:p/>
           <a:p>
             <a:r>
-              <a:t>_class: sections</a:t>
+              <a:t>_class: figure-full</a:t>
             </a:r>
           </a:p>
         </p:txBody>
@@ -1216,13 +1216,13 @@
           <a:lstStyle/>
           <a:p>
             <a:r>
-              <a:t>段階開示。②は 1 つだけ板書で微分して見せ、残りは「同じ手順」と言う。③の「P_i, Q_i で書ける」が実装上の要点で、例題 2 で H₂₂ = 21.17 を実際に出す。</a:t>
+              <a:t>前の 1 枚に ② を足しただけ。薄い段はまだ出していない段。</a:t>
             </a:r>
           </a:p>
           <a:p/>
           <a:p>
             <a:r>
-              <a:t>_class: sections</a:t>
+              <a:t>_class: figure-full</a:t>
             </a:r>
           </a:p>
         </p:txBody>
@@ -1292,13 +1292,13 @@
           <a:lstStyle/>
           <a:p>
             <a:r>
-              <a:t>段階開示。②は 1 つだけ板書で微分して見せ、残りは「同じ手順」と言う。③の「P_i, Q_i で書ける」が実装上の要点で、例題 2 で H₂₂ = 21.17 を実際に出す。</a:t>
+              <a:t>前の 1 枚に ③ を足しただけ。薄い段はまだ出していない段。</a:t>
             </a:r>
           </a:p>
           <a:p/>
           <a:p>
             <a:r>
-              <a:t>_class: sections</a:t>
+              <a:t>_class: figure-full</a:t>
             </a:r>
           </a:p>
         </p:txBody>
@@ -3244,7 +3244,7 @@
           <a:p/>
           <a:p>
             <a:r>
-              <a:t>_class: sections</a:t>
+              <a:t>_class: figure-full</a:t>
             </a:r>
           </a:p>
         </p:txBody>
@@ -7205,59 +7205,14 @@
       <p:grpSpPr/>
       <p:sp>
         <p:nvSpPr>
-          <p:cNvPr id="2" name="TextBox 1"/>
+          <p:cNvPr id="2" name="edge:title"/>
           <p:cNvSpPr txBox="1"/>
           <p:nvPr/>
         </p:nvSpPr>
         <p:spPr>
           <a:xfrm>
-            <a:off x="566928" y="457200"/>
-            <a:ext cx="11057839" cy="658368"/>
-          </a:xfrm>
-          <a:prstGeom prst="rect">
-            <a:avLst/>
-          </a:prstGeom>
-          <a:noFill/>
-        </p:spPr>
-        <p:txBody>
-          <a:bodyPr wrap="square" lIns="0" rIns="0" tIns="0" bIns="0" anchor="ctr">
-            <a:noAutofit/>
-          </a:bodyPr>
-          <a:lstStyle/>
-          <a:p>
-            <a:pPr>
-              <a:lnSpc>
-                <a:spcPct val="106000"/>
-              </a:lnSpc>
-              <a:defRPr sz="3390" b="1">
-                <a:solidFill>
-                  <a:srgbClr val="7C332A"/>
-                </a:solidFill>
-                <a:latin typeface="Avenir Next"/>
-                <a:ea typeface="Hiragino Sans"/>
-                <a:cs typeface="Hiragino Sans"/>
-              </a:defRPr>
-            </a:pPr>
-            <a:r>
-              <a:rPr>
-                <a:ea typeface="Hiragino Sans"/>
-                <a:cs typeface="Hiragino Sans"/>
-              </a:rPr>
-              <a:t>導出 — なぜ 2 次収束するのか</a:t>
-            </a:r>
-          </a:p>
-        </p:txBody>
-      </p:sp>
-      <p:sp>
-        <p:nvSpPr>
-          <p:cNvPr id="3" name="TextBox 2"/>
-          <p:cNvSpPr txBox="1"/>
-          <p:nvPr/>
-        </p:nvSpPr>
-        <p:spPr>
-          <a:xfrm>
-            <a:off x="566928" y="2229993"/>
-            <a:ext cx="11057839" cy="254000"/>
+            <a:off x="566928" y="146304"/>
+            <a:ext cx="11057839" cy="457200"/>
           </a:xfrm>
           <a:prstGeom prst="rect">
             <a:avLst/>
@@ -7270,30 +7225,60 @@
           </a:bodyPr>
           <a:lstStyle/>
           <a:p>
-            <a:r>
-              <a:rPr sz="1600" b="1">
-                <a:solidFill>
-                  <a:srgbClr val="5C7268"/>
-                </a:solidFill>
-                <a:latin typeface="Avenir Next"/>
-                <a:ea typeface="Hiragino Sans"/>
-                <a:cs typeface="Hiragino Sans"/>
-              </a:rPr>
-              <a:t>① テイラー展開｜f(x + Δx) ≈ f(x) + f′(x) Δx</a:t>
-            </a:r>
-          </a:p>
-        </p:txBody>
-      </p:sp>
-      <p:sp>
-        <p:nvSpPr>
-          <p:cNvPr id="4" name="TextBox 3"/>
+            <a:pPr>
+              <a:defRPr sz="2400" b="1">
+                <a:solidFill>
+                  <a:srgbClr val="7C332A"/>
+                </a:solidFill>
+                <a:latin typeface="Avenir Next"/>
+                <a:ea typeface="Hiragino Sans"/>
+                <a:cs typeface="Hiragino Sans"/>
+              </a:defRPr>
+            </a:pPr>
+            <a:r>
+              <a:rPr>
+                <a:ea typeface="Hiragino Sans"/>
+                <a:cs typeface="Hiragino Sans"/>
+              </a:rPr>
+              <a:t>導出 — なぜ 2 次収束するのか</a:t>
+            </a:r>
+          </a:p>
+        </p:txBody>
+      </p:sp>
+      <p:pic>
+        <p:nvPicPr>
+          <p:cNvPr id="3" name="Picture 2" descr="ch05_deriv_quad_2.png"/>
+          <p:cNvPicPr>
+            <a:picLocks noChangeAspect="1"/>
+          </p:cNvPicPr>
+          <p:nvPr/>
+        </p:nvPicPr>
+        <p:blipFill>
+          <a:blip r:embed="rId2"/>
+          <a:stretch>
+            <a:fillRect/>
+          </a:stretch>
+        </p:blipFill>
+        <p:spPr>
+          <a:xfrm>
+            <a:off x="762110" y="713232"/>
+            <a:ext cx="10667474" cy="5322316"/>
+          </a:xfrm>
+          <a:prstGeom prst="rect">
+            <a:avLst/>
+          </a:prstGeom>
+        </p:spPr>
+      </p:pic>
+      <p:sp>
+        <p:nvSpPr>
+          <p:cNvPr id="4" name="edge:caption"/>
           <p:cNvSpPr txBox="1"/>
           <p:nvPr/>
         </p:nvSpPr>
         <p:spPr>
           <a:xfrm>
-            <a:off x="822960" y="2522093"/>
-            <a:ext cx="10801807" cy="385762"/>
+            <a:off x="228600" y="6090412"/>
+            <a:ext cx="11734495" cy="520700"/>
           </a:xfrm>
           <a:prstGeom prst="rect">
             <a:avLst/>
@@ -7306,358 +7291,24 @@
           </a:bodyPr>
           <a:lstStyle/>
           <a:p>
-            <a:pPr>
-              <a:lnSpc>
-                <a:spcPct val="130000"/>
-              </a:lnSpc>
-            </a:pPr>
-            <a:r>
-              <a:rPr sz="1500">
-                <a:solidFill>
-                  <a:srgbClr val="33221E"/>
-                </a:solidFill>
-                <a:latin typeface="Avenir Next"/>
-                <a:ea typeface="Hiragino Sans"/>
-                <a:cs typeface="Hiragino Sans"/>
-              </a:rPr>
-              <a:t>2 次以降を捨てると </a:t>
-            </a:r>
-            <a:r>
-              <a:rPr sz="1500" b="1">
-                <a:solidFill>
-                  <a:srgbClr val="33221E"/>
-                </a:solidFill>
-                <a:latin typeface="Avenir Next"/>
-                <a:ea typeface="Hiragino Sans"/>
-                <a:cs typeface="Hiragino Sans"/>
-              </a:rPr>
-              <a:t>f′(x) Δx = −f(x)</a:t>
-            </a:r>
-            <a:r>
-              <a:rPr sz="1500">
-                <a:solidFill>
-                  <a:srgbClr val="33221E"/>
-                </a:solidFill>
-                <a:latin typeface="Avenir Next"/>
-                <a:ea typeface="Hiragino Sans"/>
-                <a:cs typeface="Hiragino Sans"/>
-              </a:rPr>
-              <a:t>。多変数では f′ が行列 J になり、</a:t>
-            </a:r>
-            <a:r>
-              <a:rPr sz="1500" b="1">
-                <a:solidFill>
-                  <a:srgbClr val="33221E"/>
-                </a:solidFill>
-                <a:latin typeface="Avenir Next"/>
-                <a:ea typeface="Hiragino Sans"/>
-                <a:cs typeface="Hiragino Sans"/>
-              </a:rPr>
-              <a:t>JΔx = −f(x)</a:t>
-            </a:r>
-            <a:r>
-              <a:rPr sz="1500">
-                <a:solidFill>
-                  <a:srgbClr val="33221E"/>
-                </a:solidFill>
-                <a:latin typeface="Avenir Next"/>
-                <a:ea typeface="Hiragino Sans"/>
-                <a:cs typeface="Hiragino Sans"/>
-              </a:rPr>
-              <a:t> が修正方程式。</a:t>
-            </a:r>
-          </a:p>
-        </p:txBody>
-      </p:sp>
-      <p:sp>
-        <p:nvSpPr>
-          <p:cNvPr id="5" name="Rectangle 4"/>
-          <p:cNvSpPr/>
-          <p:nvPr/>
-        </p:nvSpPr>
-        <p:spPr>
-          <a:xfrm>
-            <a:off x="566928" y="3059747"/>
-            <a:ext cx="11057839" cy="9525"/>
-          </a:xfrm>
-          <a:prstGeom prst="rect">
-            <a:avLst/>
-          </a:prstGeom>
-          <a:solidFill>
-            <a:srgbClr val="E5DCCE"/>
-          </a:solidFill>
-          <a:ln>
-            <a:noFill/>
-          </a:ln>
-          <a:effectLst/>
-        </p:spPr>
-        <p:style>
-          <a:lnRef idx="1">
-            <a:schemeClr val="accent1"/>
-          </a:lnRef>
-          <a:fillRef idx="3">
-            <a:schemeClr val="accent1"/>
-          </a:fillRef>
-          <a:effectRef idx="2">
-            <a:schemeClr val="accent1"/>
-          </a:effectRef>
-          <a:fontRef idx="minor">
-            <a:schemeClr val="lt1"/>
-          </a:fontRef>
-        </p:style>
-        <p:txBody>
-          <a:bodyPr rtlCol="0" anchor="ctr"/>
-          <a:lstStyle/>
-          <a:p>
             <a:pPr algn="ctr"/>
-          </a:p>
-        </p:txBody>
-      </p:sp>
-      <p:sp>
-        <p:nvSpPr>
-          <p:cNvPr id="6" name="TextBox 5"/>
-          <p:cNvSpPr txBox="1"/>
-          <p:nvPr/>
-        </p:nvSpPr>
-        <p:spPr>
-          <a:xfrm>
-            <a:off x="566928" y="3237039"/>
-            <a:ext cx="11057839" cy="254000"/>
-          </a:xfrm>
-          <a:prstGeom prst="rect">
-            <a:avLst/>
-          </a:prstGeom>
-          <a:noFill/>
-        </p:spPr>
-        <p:txBody>
-          <a:bodyPr wrap="none" lIns="0" rIns="0" tIns="0" bIns="0">
-            <a:noAutofit/>
-          </a:bodyPr>
-          <a:lstStyle/>
-          <a:p>
-            <a:r>
-              <a:rPr sz="1600" b="1">
-                <a:solidFill>
-                  <a:srgbClr val="5C7268"/>
-                </a:solidFill>
-                <a:latin typeface="Avenir Next"/>
-                <a:ea typeface="Hiragino Sans"/>
-                <a:cs typeface="Hiragino Sans"/>
-              </a:rPr>
-              <a:t>② 捨てた項が次の誤差｜e_{n+1} ≈ (f″/2f′) e_n²</a:t>
-            </a:r>
-          </a:p>
-        </p:txBody>
-      </p:sp>
-      <p:sp>
-        <p:nvSpPr>
-          <p:cNvPr id="7" name="TextBox 6"/>
-          <p:cNvSpPr txBox="1"/>
-          <p:nvPr/>
-        </p:nvSpPr>
-        <p:spPr>
-          <a:xfrm>
-            <a:off x="822960" y="3529139"/>
-            <a:ext cx="10801807" cy="695325"/>
-          </a:xfrm>
-          <a:prstGeom prst="rect">
-            <a:avLst/>
-          </a:prstGeom>
-          <a:noFill/>
-        </p:spPr>
-        <p:txBody>
-          <a:bodyPr wrap="square" lIns="0" rIns="0" tIns="0" bIns="0">
-            <a:noAutofit/>
-          </a:bodyPr>
-          <a:lstStyle/>
-          <a:p>
-            <a:pPr>
-              <a:lnSpc>
-                <a:spcPct val="130000"/>
-              </a:lnSpc>
-            </a:pPr>
-            <a:r>
-              <a:rPr sz="1500">
-                <a:solidFill>
-                  <a:srgbClr val="33221E"/>
-                </a:solidFill>
-                <a:latin typeface="Avenir Next"/>
-                <a:ea typeface="Hiragino Sans"/>
-                <a:cs typeface="Hiragino Sans"/>
-              </a:rPr>
-              <a:t>真の解 x* で f(x*) = 0 を展開すると、1 次の項は接線で消え、残るのは </a:t>
-            </a:r>
-            <a:r>
-              <a:rPr sz="1500" b="1">
-                <a:solidFill>
-                  <a:srgbClr val="33221E"/>
-                </a:solidFill>
-                <a:latin typeface="Avenir Next"/>
-                <a:ea typeface="Hiragino Sans"/>
-                <a:cs typeface="Hiragino Sans"/>
-              </a:rPr>
-              <a:t>e_n² に比例する項</a:t>
-            </a:r>
-            <a:r>
-              <a:rPr sz="1500">
-                <a:solidFill>
-                  <a:srgbClr val="33221E"/>
-                </a:solidFill>
-                <a:latin typeface="Avenir Next"/>
-                <a:ea typeface="Hiragino Sans"/>
-                <a:cs typeface="Hiragino Sans"/>
-              </a:rPr>
-              <a:t> だけ。今の誤差が 10⁻² なら次は 10⁻⁴ のオーダー。</a:t>
-            </a:r>
-          </a:p>
-        </p:txBody>
-      </p:sp>
-      <p:sp>
-        <p:nvSpPr>
-          <p:cNvPr id="8" name="Rectangle 7"/>
-          <p:cNvSpPr/>
-          <p:nvPr/>
-        </p:nvSpPr>
-        <p:spPr>
-          <a:xfrm>
-            <a:off x="566928" y="4376356"/>
-            <a:ext cx="11057839" cy="9525"/>
-          </a:xfrm>
-          <a:prstGeom prst="rect">
-            <a:avLst/>
-          </a:prstGeom>
-          <a:solidFill>
-            <a:srgbClr val="E5DCCE"/>
-          </a:solidFill>
-          <a:ln>
-            <a:noFill/>
-          </a:ln>
-          <a:effectLst/>
-        </p:spPr>
-        <p:style>
-          <a:lnRef idx="1">
-            <a:schemeClr val="accent1"/>
-          </a:lnRef>
-          <a:fillRef idx="3">
-            <a:schemeClr val="accent1"/>
-          </a:fillRef>
-          <a:effectRef idx="2">
-            <a:schemeClr val="accent1"/>
-          </a:effectRef>
-          <a:fontRef idx="minor">
-            <a:schemeClr val="lt1"/>
-          </a:fontRef>
-        </p:style>
-        <p:txBody>
-          <a:bodyPr rtlCol="0" anchor="ctr"/>
-          <a:lstStyle/>
-          <a:p>
-            <a:pPr algn="ctr"/>
-          </a:p>
-        </p:txBody>
-      </p:sp>
-      <p:sp>
-        <p:nvSpPr>
-          <p:cNvPr id="9" name="build:ghost"/>
-          <p:cNvSpPr txBox="1"/>
-          <p:nvPr/>
-        </p:nvSpPr>
-        <p:spPr>
-          <a:xfrm>
-            <a:off x="566928" y="4553648"/>
-            <a:ext cx="11057839" cy="254000"/>
-          </a:xfrm>
-          <a:prstGeom prst="rect">
-            <a:avLst/>
-          </a:prstGeom>
-          <a:noFill/>
-        </p:spPr>
-        <p:txBody>
-          <a:bodyPr wrap="none" lIns="0" rIns="0" tIns="0" bIns="0">
-            <a:noAutofit/>
-          </a:bodyPr>
-          <a:lstStyle/>
-          <a:p>
-            <a:r>
-              <a:rPr sz="1600" b="1">
-                <a:solidFill>
-                  <a:srgbClr val="C1C9C5"/>
-                </a:solidFill>
-                <a:latin typeface="Avenir Next"/>
-                <a:ea typeface="Hiragino Sans"/>
-                <a:cs typeface="Hiragino Sans"/>
-              </a:rPr>
-              <a:t>③ 桁が倍々｜1 → 2 → 4 → 8 → 16 桁</a:t>
-            </a:r>
-          </a:p>
-        </p:txBody>
-      </p:sp>
-      <p:sp>
-        <p:nvSpPr>
-          <p:cNvPr id="10" name="build:ghost"/>
-          <p:cNvSpPr txBox="1"/>
-          <p:nvPr/>
-        </p:nvSpPr>
-        <p:spPr>
-          <a:xfrm>
-            <a:off x="822960" y="4845748"/>
-            <a:ext cx="10801807" cy="385762"/>
-          </a:xfrm>
-          <a:prstGeom prst="rect">
-            <a:avLst/>
-          </a:prstGeom>
-          <a:noFill/>
-        </p:spPr>
-        <p:txBody>
-          <a:bodyPr wrap="square" lIns="0" rIns="0" tIns="0" bIns="0">
-            <a:noAutofit/>
-          </a:bodyPr>
-          <a:lstStyle/>
-          <a:p>
-            <a:pPr>
-              <a:lnSpc>
-                <a:spcPct val="130000"/>
-              </a:lnSpc>
-            </a:pPr>
-            <a:r>
-              <a:rPr sz="1500">
-                <a:solidFill>
-                  <a:srgbClr val="C1BCBB"/>
-                </a:solidFill>
-                <a:latin typeface="Avenir Next"/>
-                <a:ea typeface="Hiragino Sans"/>
-                <a:cs typeface="Hiragino Sans"/>
-              </a:rPr>
-              <a:t>10⁻⁸ に届くのに 4 回。10⁻¹⁶ でも 5 回。</a:t>
-            </a:r>
-            <a:r>
-              <a:rPr sz="1500" b="1">
-                <a:solidFill>
-                  <a:srgbClr val="C1BCBB"/>
-                </a:solidFill>
-                <a:latin typeface="Avenir Next"/>
-                <a:ea typeface="Hiragino Sans"/>
-                <a:cs typeface="Hiragino Sans"/>
-              </a:rPr>
-              <a:t>系統の母線数は式に出てこない</a:t>
-            </a:r>
-            <a:r>
-              <a:rPr sz="1500">
-                <a:solidFill>
-                  <a:srgbClr val="C1BCBB"/>
-                </a:solidFill>
-                <a:latin typeface="Avenir Next"/>
-                <a:ea typeface="Hiragino Sans"/>
-                <a:cs typeface="Hiragino Sans"/>
-              </a:rPr>
-              <a:t>ので、規模によらず 3〜5 回で収束する。</a:t>
-            </a:r>
-          </a:p>
-        </p:txBody>
-      </p:sp>
-      <p:sp>
-        <p:nvSpPr>
-          <p:cNvPr id="11" name="TextBox 10"/>
+            <a:r>
+              <a:rPr sz="1400">
+                <a:solidFill>
+                  <a:srgbClr val="71635B"/>
+                </a:solidFill>
+                <a:latin typeface="Avenir Next"/>
+                <a:ea typeface="Hiragino Sans"/>
+                <a:cs typeface="Hiragino Sans"/>
+              </a:rPr>
+              <a:t>真の解 x* で f(x*) = 0 を展開すると、1 次の項は接線で消え、残るのは e_n² に比例する項 だけ。今の誤差が 10⁻² なら次は 10⁻⁴ のオーダー。　出典｜コード/fig_ch05.py</a:t>
+            </a:r>
+          </a:p>
+        </p:txBody>
+      </p:sp>
+      <p:sp>
+        <p:nvSpPr>
+          <p:cNvPr id="5" name="TextBox 4"/>
           <p:cNvSpPr txBox="1"/>
           <p:nvPr/>
         </p:nvSpPr>
@@ -7713,59 +7364,14 @@
       <p:grpSpPr/>
       <p:sp>
         <p:nvSpPr>
-          <p:cNvPr id="2" name="TextBox 1"/>
+          <p:cNvPr id="2" name="edge:title"/>
           <p:cNvSpPr txBox="1"/>
           <p:nvPr/>
         </p:nvSpPr>
         <p:spPr>
           <a:xfrm>
-            <a:off x="566928" y="457200"/>
-            <a:ext cx="11057839" cy="658368"/>
-          </a:xfrm>
-          <a:prstGeom prst="rect">
-            <a:avLst/>
-          </a:prstGeom>
-          <a:noFill/>
-        </p:spPr>
-        <p:txBody>
-          <a:bodyPr wrap="square" lIns="0" rIns="0" tIns="0" bIns="0" anchor="ctr">
-            <a:noAutofit/>
-          </a:bodyPr>
-          <a:lstStyle/>
-          <a:p>
-            <a:pPr>
-              <a:lnSpc>
-                <a:spcPct val="106000"/>
-              </a:lnSpc>
-              <a:defRPr sz="3390" b="1">
-                <a:solidFill>
-                  <a:srgbClr val="7C332A"/>
-                </a:solidFill>
-                <a:latin typeface="Avenir Next"/>
-                <a:ea typeface="Hiragino Sans"/>
-                <a:cs typeface="Hiragino Sans"/>
-              </a:defRPr>
-            </a:pPr>
-            <a:r>
-              <a:rPr>
-                <a:ea typeface="Hiragino Sans"/>
-                <a:cs typeface="Hiragino Sans"/>
-              </a:rPr>
-              <a:t>導出 — なぜ 2 次収束するのか</a:t>
-            </a:r>
-          </a:p>
-        </p:txBody>
-      </p:sp>
-      <p:sp>
-        <p:nvSpPr>
-          <p:cNvPr id="3" name="TextBox 2"/>
-          <p:cNvSpPr txBox="1"/>
-          <p:nvPr/>
-        </p:nvSpPr>
-        <p:spPr>
-          <a:xfrm>
-            <a:off x="566928" y="2229993"/>
-            <a:ext cx="11057839" cy="254000"/>
+            <a:off x="566928" y="146304"/>
+            <a:ext cx="11057839" cy="457200"/>
           </a:xfrm>
           <a:prstGeom prst="rect">
             <a:avLst/>
@@ -7778,30 +7384,60 @@
           </a:bodyPr>
           <a:lstStyle/>
           <a:p>
-            <a:r>
-              <a:rPr sz="1600" b="1">
-                <a:solidFill>
-                  <a:srgbClr val="5C7268"/>
-                </a:solidFill>
-                <a:latin typeface="Avenir Next"/>
-                <a:ea typeface="Hiragino Sans"/>
-                <a:cs typeface="Hiragino Sans"/>
-              </a:rPr>
-              <a:t>① テイラー展開｜f(x + Δx) ≈ f(x) + f′(x) Δx</a:t>
-            </a:r>
-          </a:p>
-        </p:txBody>
-      </p:sp>
-      <p:sp>
-        <p:nvSpPr>
-          <p:cNvPr id="4" name="TextBox 3"/>
+            <a:pPr>
+              <a:defRPr sz="2400" b="1">
+                <a:solidFill>
+                  <a:srgbClr val="7C332A"/>
+                </a:solidFill>
+                <a:latin typeface="Avenir Next"/>
+                <a:ea typeface="Hiragino Sans"/>
+                <a:cs typeface="Hiragino Sans"/>
+              </a:defRPr>
+            </a:pPr>
+            <a:r>
+              <a:rPr>
+                <a:ea typeface="Hiragino Sans"/>
+                <a:cs typeface="Hiragino Sans"/>
+              </a:rPr>
+              <a:t>導出 — なぜ 2 次収束するのか</a:t>
+            </a:r>
+          </a:p>
+        </p:txBody>
+      </p:sp>
+      <p:pic>
+        <p:nvPicPr>
+          <p:cNvPr id="3" name="Picture 2" descr="ch05_deriv_quad_3.png"/>
+          <p:cNvPicPr>
+            <a:picLocks noChangeAspect="1"/>
+          </p:cNvPicPr>
+          <p:nvPr/>
+        </p:nvPicPr>
+        <p:blipFill>
+          <a:blip r:embed="rId2"/>
+          <a:stretch>
+            <a:fillRect/>
+          </a:stretch>
+        </p:blipFill>
+        <p:spPr>
+          <a:xfrm>
+            <a:off x="551856" y="713232"/>
+            <a:ext cx="11087983" cy="5532120"/>
+          </a:xfrm>
+          <a:prstGeom prst="rect">
+            <a:avLst/>
+          </a:prstGeom>
+        </p:spPr>
+      </p:pic>
+      <p:sp>
+        <p:nvSpPr>
+          <p:cNvPr id="4" name="edge:caption"/>
           <p:cNvSpPr txBox="1"/>
           <p:nvPr/>
         </p:nvSpPr>
         <p:spPr>
           <a:xfrm>
-            <a:off x="822960" y="2522093"/>
-            <a:ext cx="10801807" cy="385762"/>
+            <a:off x="228600" y="6300216"/>
+            <a:ext cx="11734495" cy="310896"/>
           </a:xfrm>
           <a:prstGeom prst="rect">
             <a:avLst/>
@@ -7814,358 +7450,24 @@
           </a:bodyPr>
           <a:lstStyle/>
           <a:p>
-            <a:pPr>
-              <a:lnSpc>
-                <a:spcPct val="130000"/>
-              </a:lnSpc>
-            </a:pPr>
-            <a:r>
-              <a:rPr sz="1500">
-                <a:solidFill>
-                  <a:srgbClr val="33221E"/>
-                </a:solidFill>
-                <a:latin typeface="Avenir Next"/>
-                <a:ea typeface="Hiragino Sans"/>
-                <a:cs typeface="Hiragino Sans"/>
-              </a:rPr>
-              <a:t>2 次以降を捨てると </a:t>
-            </a:r>
-            <a:r>
-              <a:rPr sz="1500" b="1">
-                <a:solidFill>
-                  <a:srgbClr val="33221E"/>
-                </a:solidFill>
-                <a:latin typeface="Avenir Next"/>
-                <a:ea typeface="Hiragino Sans"/>
-                <a:cs typeface="Hiragino Sans"/>
-              </a:rPr>
-              <a:t>f′(x) Δx = −f(x)</a:t>
-            </a:r>
-            <a:r>
-              <a:rPr sz="1500">
-                <a:solidFill>
-                  <a:srgbClr val="33221E"/>
-                </a:solidFill>
-                <a:latin typeface="Avenir Next"/>
-                <a:ea typeface="Hiragino Sans"/>
-                <a:cs typeface="Hiragino Sans"/>
-              </a:rPr>
-              <a:t>。多変数では f′ が行列 J になり、</a:t>
-            </a:r>
-            <a:r>
-              <a:rPr sz="1500" b="1">
-                <a:solidFill>
-                  <a:srgbClr val="33221E"/>
-                </a:solidFill>
-                <a:latin typeface="Avenir Next"/>
-                <a:ea typeface="Hiragino Sans"/>
-                <a:cs typeface="Hiragino Sans"/>
-              </a:rPr>
-              <a:t>JΔx = −f(x)</a:t>
-            </a:r>
-            <a:r>
-              <a:rPr sz="1500">
-                <a:solidFill>
-                  <a:srgbClr val="33221E"/>
-                </a:solidFill>
-                <a:latin typeface="Avenir Next"/>
-                <a:ea typeface="Hiragino Sans"/>
-                <a:cs typeface="Hiragino Sans"/>
-              </a:rPr>
-              <a:t> が修正方程式。</a:t>
-            </a:r>
-          </a:p>
-        </p:txBody>
-      </p:sp>
-      <p:sp>
-        <p:nvSpPr>
-          <p:cNvPr id="5" name="Rectangle 4"/>
-          <p:cNvSpPr/>
-          <p:nvPr/>
-        </p:nvSpPr>
-        <p:spPr>
-          <a:xfrm>
-            <a:off x="566928" y="3059747"/>
-            <a:ext cx="11057839" cy="9525"/>
-          </a:xfrm>
-          <a:prstGeom prst="rect">
-            <a:avLst/>
-          </a:prstGeom>
-          <a:solidFill>
-            <a:srgbClr val="E5DCCE"/>
-          </a:solidFill>
-          <a:ln>
-            <a:noFill/>
-          </a:ln>
-          <a:effectLst/>
-        </p:spPr>
-        <p:style>
-          <a:lnRef idx="1">
-            <a:schemeClr val="accent1"/>
-          </a:lnRef>
-          <a:fillRef idx="3">
-            <a:schemeClr val="accent1"/>
-          </a:fillRef>
-          <a:effectRef idx="2">
-            <a:schemeClr val="accent1"/>
-          </a:effectRef>
-          <a:fontRef idx="minor">
-            <a:schemeClr val="lt1"/>
-          </a:fontRef>
-        </p:style>
-        <p:txBody>
-          <a:bodyPr rtlCol="0" anchor="ctr"/>
-          <a:lstStyle/>
-          <a:p>
             <a:pPr algn="ctr"/>
-          </a:p>
-        </p:txBody>
-      </p:sp>
-      <p:sp>
-        <p:nvSpPr>
-          <p:cNvPr id="6" name="TextBox 5"/>
-          <p:cNvSpPr txBox="1"/>
-          <p:nvPr/>
-        </p:nvSpPr>
-        <p:spPr>
-          <a:xfrm>
-            <a:off x="566928" y="3237039"/>
-            <a:ext cx="11057839" cy="254000"/>
-          </a:xfrm>
-          <a:prstGeom prst="rect">
-            <a:avLst/>
-          </a:prstGeom>
-          <a:noFill/>
-        </p:spPr>
-        <p:txBody>
-          <a:bodyPr wrap="none" lIns="0" rIns="0" tIns="0" bIns="0">
-            <a:noAutofit/>
-          </a:bodyPr>
-          <a:lstStyle/>
-          <a:p>
-            <a:r>
-              <a:rPr sz="1600" b="1">
-                <a:solidFill>
-                  <a:srgbClr val="5C7268"/>
-                </a:solidFill>
-                <a:latin typeface="Avenir Next"/>
-                <a:ea typeface="Hiragino Sans"/>
-                <a:cs typeface="Hiragino Sans"/>
-              </a:rPr>
-              <a:t>② 捨てた項が次の誤差｜e_{n+1} ≈ (f″/2f′) e_n²</a:t>
-            </a:r>
-          </a:p>
-        </p:txBody>
-      </p:sp>
-      <p:sp>
-        <p:nvSpPr>
-          <p:cNvPr id="7" name="TextBox 6"/>
-          <p:cNvSpPr txBox="1"/>
-          <p:nvPr/>
-        </p:nvSpPr>
-        <p:spPr>
-          <a:xfrm>
-            <a:off x="822960" y="3529139"/>
-            <a:ext cx="10801807" cy="695325"/>
-          </a:xfrm>
-          <a:prstGeom prst="rect">
-            <a:avLst/>
-          </a:prstGeom>
-          <a:noFill/>
-        </p:spPr>
-        <p:txBody>
-          <a:bodyPr wrap="square" lIns="0" rIns="0" tIns="0" bIns="0">
-            <a:noAutofit/>
-          </a:bodyPr>
-          <a:lstStyle/>
-          <a:p>
-            <a:pPr>
-              <a:lnSpc>
-                <a:spcPct val="130000"/>
-              </a:lnSpc>
-            </a:pPr>
-            <a:r>
-              <a:rPr sz="1500">
-                <a:solidFill>
-                  <a:srgbClr val="33221E"/>
-                </a:solidFill>
-                <a:latin typeface="Avenir Next"/>
-                <a:ea typeface="Hiragino Sans"/>
-                <a:cs typeface="Hiragino Sans"/>
-              </a:rPr>
-              <a:t>真の解 x* で f(x*) = 0 を展開すると、1 次の項は接線で消え、残るのは </a:t>
-            </a:r>
-            <a:r>
-              <a:rPr sz="1500" b="1">
-                <a:solidFill>
-                  <a:srgbClr val="33221E"/>
-                </a:solidFill>
-                <a:latin typeface="Avenir Next"/>
-                <a:ea typeface="Hiragino Sans"/>
-                <a:cs typeface="Hiragino Sans"/>
-              </a:rPr>
-              <a:t>e_n² に比例する項</a:t>
-            </a:r>
-            <a:r>
-              <a:rPr sz="1500">
-                <a:solidFill>
-                  <a:srgbClr val="33221E"/>
-                </a:solidFill>
-                <a:latin typeface="Avenir Next"/>
-                <a:ea typeface="Hiragino Sans"/>
-                <a:cs typeface="Hiragino Sans"/>
-              </a:rPr>
-              <a:t> だけ。今の誤差が 10⁻² なら次は 10⁻⁴ のオーダー。</a:t>
-            </a:r>
-          </a:p>
-        </p:txBody>
-      </p:sp>
-      <p:sp>
-        <p:nvSpPr>
-          <p:cNvPr id="8" name="Rectangle 7"/>
-          <p:cNvSpPr/>
-          <p:nvPr/>
-        </p:nvSpPr>
-        <p:spPr>
-          <a:xfrm>
-            <a:off x="566928" y="4376356"/>
-            <a:ext cx="11057839" cy="9525"/>
-          </a:xfrm>
-          <a:prstGeom prst="rect">
-            <a:avLst/>
-          </a:prstGeom>
-          <a:solidFill>
-            <a:srgbClr val="E5DCCE"/>
-          </a:solidFill>
-          <a:ln>
-            <a:noFill/>
-          </a:ln>
-          <a:effectLst/>
-        </p:spPr>
-        <p:style>
-          <a:lnRef idx="1">
-            <a:schemeClr val="accent1"/>
-          </a:lnRef>
-          <a:fillRef idx="3">
-            <a:schemeClr val="accent1"/>
-          </a:fillRef>
-          <a:effectRef idx="2">
-            <a:schemeClr val="accent1"/>
-          </a:effectRef>
-          <a:fontRef idx="minor">
-            <a:schemeClr val="lt1"/>
-          </a:fontRef>
-        </p:style>
-        <p:txBody>
-          <a:bodyPr rtlCol="0" anchor="ctr"/>
-          <a:lstStyle/>
-          <a:p>
-            <a:pPr algn="ctr"/>
-          </a:p>
-        </p:txBody>
-      </p:sp>
-      <p:sp>
-        <p:nvSpPr>
-          <p:cNvPr id="9" name="TextBox 8"/>
-          <p:cNvSpPr txBox="1"/>
-          <p:nvPr/>
-        </p:nvSpPr>
-        <p:spPr>
-          <a:xfrm>
-            <a:off x="566928" y="4553648"/>
-            <a:ext cx="11057839" cy="254000"/>
-          </a:xfrm>
-          <a:prstGeom prst="rect">
-            <a:avLst/>
-          </a:prstGeom>
-          <a:noFill/>
-        </p:spPr>
-        <p:txBody>
-          <a:bodyPr wrap="none" lIns="0" rIns="0" tIns="0" bIns="0">
-            <a:noAutofit/>
-          </a:bodyPr>
-          <a:lstStyle/>
-          <a:p>
-            <a:r>
-              <a:rPr sz="1600" b="1">
-                <a:solidFill>
-                  <a:srgbClr val="5C7268"/>
-                </a:solidFill>
-                <a:latin typeface="Avenir Next"/>
-                <a:ea typeface="Hiragino Sans"/>
-                <a:cs typeface="Hiragino Sans"/>
-              </a:rPr>
-              <a:t>③ 桁が倍々｜1 → 2 → 4 → 8 → 16 桁</a:t>
-            </a:r>
-          </a:p>
-        </p:txBody>
-      </p:sp>
-      <p:sp>
-        <p:nvSpPr>
-          <p:cNvPr id="10" name="TextBox 9"/>
-          <p:cNvSpPr txBox="1"/>
-          <p:nvPr/>
-        </p:nvSpPr>
-        <p:spPr>
-          <a:xfrm>
-            <a:off x="822960" y="4845748"/>
-            <a:ext cx="10801807" cy="385762"/>
-          </a:xfrm>
-          <a:prstGeom prst="rect">
-            <a:avLst/>
-          </a:prstGeom>
-          <a:noFill/>
-        </p:spPr>
-        <p:txBody>
-          <a:bodyPr wrap="square" lIns="0" rIns="0" tIns="0" bIns="0">
-            <a:noAutofit/>
-          </a:bodyPr>
-          <a:lstStyle/>
-          <a:p>
-            <a:pPr>
-              <a:lnSpc>
-                <a:spcPct val="130000"/>
-              </a:lnSpc>
-            </a:pPr>
-            <a:r>
-              <a:rPr sz="1500">
-                <a:solidFill>
-                  <a:srgbClr val="33221E"/>
-                </a:solidFill>
-                <a:latin typeface="Avenir Next"/>
-                <a:ea typeface="Hiragino Sans"/>
-                <a:cs typeface="Hiragino Sans"/>
-              </a:rPr>
-              <a:t>10⁻⁸ に届くのに 4 回。10⁻¹⁶ でも 5 回。</a:t>
-            </a:r>
-            <a:r>
-              <a:rPr sz="1500" b="1">
-                <a:solidFill>
-                  <a:srgbClr val="33221E"/>
-                </a:solidFill>
-                <a:latin typeface="Avenir Next"/>
-                <a:ea typeface="Hiragino Sans"/>
-                <a:cs typeface="Hiragino Sans"/>
-              </a:rPr>
-              <a:t>系統の母線数は式に出てこない</a:t>
-            </a:r>
-            <a:r>
-              <a:rPr sz="1500">
-                <a:solidFill>
-                  <a:srgbClr val="33221E"/>
-                </a:solidFill>
-                <a:latin typeface="Avenir Next"/>
-                <a:ea typeface="Hiragino Sans"/>
-                <a:cs typeface="Hiragino Sans"/>
-              </a:rPr>
-              <a:t>ので、規模によらず 3〜5 回で収束する。</a:t>
-            </a:r>
-          </a:p>
-        </p:txBody>
-      </p:sp>
-      <p:sp>
-        <p:nvSpPr>
-          <p:cNvPr id="11" name="TextBox 10"/>
+            <a:r>
+              <a:rPr sz="1400">
+                <a:solidFill>
+                  <a:srgbClr val="71635B"/>
+                </a:solidFill>
+                <a:latin typeface="Avenir Next"/>
+                <a:ea typeface="Hiragino Sans"/>
+                <a:cs typeface="Hiragino Sans"/>
+              </a:rPr>
+              <a:t>10⁻⁸ に届くのに 4 回。10⁻¹⁶ でも 5 回。系統の母線数は式に出てこないので、規模によらず 3〜5 回で収束する。　出典｜コード/fig_ch05.py</a:t>
+            </a:r>
+          </a:p>
+        </p:txBody>
+      </p:sp>
+      <p:sp>
+        <p:nvSpPr>
+          <p:cNvPr id="5" name="TextBox 4"/>
           <p:cNvSpPr txBox="1"/>
           <p:nvPr/>
         </p:nvSpPr>
@@ -10721,59 +10023,14 @@
       <p:grpSpPr/>
       <p:sp>
         <p:nvSpPr>
-          <p:cNvPr id="2" name="TextBox 1"/>
+          <p:cNvPr id="2" name="edge:title"/>
           <p:cNvSpPr txBox="1"/>
           <p:nvPr/>
         </p:nvSpPr>
         <p:spPr>
           <a:xfrm>
-            <a:off x="566928" y="457200"/>
-            <a:ext cx="11057839" cy="658368"/>
-          </a:xfrm>
-          <a:prstGeom prst="rect">
-            <a:avLst/>
-          </a:prstGeom>
-          <a:noFill/>
-        </p:spPr>
-        <p:txBody>
-          <a:bodyPr wrap="square" lIns="0" rIns="0" tIns="0" bIns="0" anchor="ctr">
-            <a:noAutofit/>
-          </a:bodyPr>
-          <a:lstStyle/>
-          <a:p>
-            <a:pPr>
-              <a:lnSpc>
-                <a:spcPct val="106000"/>
-              </a:lnSpc>
-              <a:defRPr sz="3390" b="1">
-                <a:solidFill>
-                  <a:srgbClr val="7C332A"/>
-                </a:solidFill>
-                <a:latin typeface="Avenir Next"/>
-                <a:ea typeface="Hiragino Sans"/>
-                <a:cs typeface="Hiragino Sans"/>
-              </a:defRPr>
-            </a:pPr>
-            <a:r>
-              <a:rPr>
-                <a:ea typeface="Hiragino Sans"/>
-                <a:cs typeface="Hiragino Sans"/>
-              </a:rPr>
-              <a:t>導出 — ヤコビアンの 4 ブロック</a:t>
-            </a:r>
-          </a:p>
-        </p:txBody>
-      </p:sp>
-      <p:sp>
-        <p:nvSpPr>
-          <p:cNvPr id="3" name="TextBox 2"/>
-          <p:cNvSpPr txBox="1"/>
-          <p:nvPr/>
-        </p:nvSpPr>
-        <p:spPr>
-          <a:xfrm>
-            <a:off x="566928" y="1920430"/>
-            <a:ext cx="11057839" cy="254000"/>
+            <a:off x="566928" y="146304"/>
+            <a:ext cx="11057839" cy="457200"/>
           </a:xfrm>
           <a:prstGeom prst="rect">
             <a:avLst/>
@@ -10786,30 +10043,60 @@
           </a:bodyPr>
           <a:lstStyle/>
           <a:p>
-            <a:r>
-              <a:rPr sz="1600" b="1">
-                <a:solidFill>
-                  <a:srgbClr val="5C7268"/>
-                </a:solidFill>
-                <a:latin typeface="Avenir Next"/>
-                <a:ea typeface="Hiragino Sans"/>
-                <a:cs typeface="Hiragino Sans"/>
-              </a:rPr>
-              <a:t>① 何を何で微分するか｜未知数 (θ, V)、式 (ΔP, ΔQ)</a:t>
-            </a:r>
-          </a:p>
-        </p:txBody>
-      </p:sp>
-      <p:sp>
-        <p:nvSpPr>
-          <p:cNvPr id="4" name="TextBox 3"/>
+            <a:pPr>
+              <a:defRPr sz="2400" b="1">
+                <a:solidFill>
+                  <a:srgbClr val="7C332A"/>
+                </a:solidFill>
+                <a:latin typeface="Avenir Next"/>
+                <a:ea typeface="Hiragino Sans"/>
+                <a:cs typeface="Hiragino Sans"/>
+              </a:defRPr>
+            </a:pPr>
+            <a:r>
+              <a:rPr>
+                <a:ea typeface="Hiragino Sans"/>
+                <a:cs typeface="Hiragino Sans"/>
+              </a:rPr>
+              <a:t>導出 — ヤコビアンの 4 ブロック</a:t>
+            </a:r>
+          </a:p>
+        </p:txBody>
+      </p:sp>
+      <p:pic>
+        <p:nvPicPr>
+          <p:cNvPr id="3" name="Picture 2" descr="ch05_deriv_jacobian_1.png"/>
+          <p:cNvPicPr>
+            <a:picLocks noChangeAspect="1"/>
+          </p:cNvPicPr>
+          <p:nvPr/>
+        </p:nvPicPr>
+        <p:blipFill>
+          <a:blip r:embed="rId2"/>
+          <a:stretch>
+            <a:fillRect/>
+          </a:stretch>
+        </p:blipFill>
+        <p:spPr>
+          <a:xfrm>
+            <a:off x="644090" y="713232"/>
+            <a:ext cx="10903514" cy="5322316"/>
+          </a:xfrm>
+          <a:prstGeom prst="rect">
+            <a:avLst/>
+          </a:prstGeom>
+        </p:spPr>
+      </p:pic>
+      <p:sp>
+        <p:nvSpPr>
+          <p:cNvPr id="4" name="edge:caption"/>
           <p:cNvSpPr txBox="1"/>
           <p:nvPr/>
         </p:nvSpPr>
         <p:spPr>
           <a:xfrm>
-            <a:off x="822960" y="2212530"/>
-            <a:ext cx="10801807" cy="695325"/>
+            <a:off x="228600" y="6090412"/>
+            <a:ext cx="11734495" cy="520700"/>
           </a:xfrm>
           <a:prstGeom prst="rect">
             <a:avLst/>
@@ -10822,336 +10109,24 @@
           </a:bodyPr>
           <a:lstStyle/>
           <a:p>
-            <a:pPr>
-              <a:lnSpc>
-                <a:spcPct val="130000"/>
-              </a:lnSpc>
-            </a:pPr>
-            <a:r>
-              <a:rPr sz="1500">
-                <a:solidFill>
-                  <a:srgbClr val="33221E"/>
-                </a:solidFill>
-                <a:latin typeface="Avenir Next"/>
-                <a:ea typeface="Hiragino Sans"/>
-                <a:cs typeface="Hiragino Sans"/>
-              </a:rPr>
-              <a:t>P_i = V_i Σ_j V_j (G_ij cos θ_ij + B_ij sin θ_ij) を θ_j と V_j で微分する。</a:t>
-            </a:r>
-            <a:r>
-              <a:rPr sz="1500" b="1">
-                <a:solidFill>
-                  <a:srgbClr val="33221E"/>
-                </a:solidFill>
-                <a:latin typeface="Avenir Next"/>
-                <a:ea typeface="Hiragino Sans"/>
-                <a:cs typeface="Hiragino Sans"/>
-              </a:rPr>
-              <a:t>H = ∂P/∂θ、N = V∂P/∂V、M = ∂Q/∂θ、L = V∂Q/∂V</a:t>
-            </a:r>
-            <a:r>
-              <a:rPr sz="1500">
-                <a:solidFill>
-                  <a:srgbClr val="33221E"/>
-                </a:solidFill>
-                <a:latin typeface="Avenir Next"/>
-                <a:ea typeface="Hiragino Sans"/>
-                <a:cs typeface="Hiragino Sans"/>
-              </a:rPr>
-              <a:t>。V は ΔV/V で正規化すると式が対称になる。</a:t>
-            </a:r>
-          </a:p>
-        </p:txBody>
-      </p:sp>
-      <p:sp>
-        <p:nvSpPr>
-          <p:cNvPr id="5" name="Rectangle 4"/>
-          <p:cNvSpPr/>
-          <p:nvPr/>
-        </p:nvSpPr>
-        <p:spPr>
-          <a:xfrm>
-            <a:off x="566928" y="3059747"/>
-            <a:ext cx="11057839" cy="9525"/>
-          </a:xfrm>
-          <a:prstGeom prst="rect">
-            <a:avLst/>
-          </a:prstGeom>
-          <a:solidFill>
-            <a:srgbClr val="E5DCCE"/>
-          </a:solidFill>
-          <a:ln>
-            <a:noFill/>
-          </a:ln>
-          <a:effectLst/>
-        </p:spPr>
-        <p:style>
-          <a:lnRef idx="1">
-            <a:schemeClr val="accent1"/>
-          </a:lnRef>
-          <a:fillRef idx="3">
-            <a:schemeClr val="accent1"/>
-          </a:fillRef>
-          <a:effectRef idx="2">
-            <a:schemeClr val="accent1"/>
-          </a:effectRef>
-          <a:fontRef idx="minor">
-            <a:schemeClr val="lt1"/>
-          </a:fontRef>
-        </p:style>
-        <p:txBody>
-          <a:bodyPr rtlCol="0" anchor="ctr"/>
-          <a:lstStyle/>
-          <a:p>
             <a:pPr algn="ctr"/>
-          </a:p>
-        </p:txBody>
-      </p:sp>
-      <p:sp>
-        <p:nvSpPr>
-          <p:cNvPr id="6" name="build:ghost"/>
-          <p:cNvSpPr txBox="1"/>
-          <p:nvPr/>
-        </p:nvSpPr>
-        <p:spPr>
-          <a:xfrm>
-            <a:off x="566928" y="3237039"/>
-            <a:ext cx="11057839" cy="254000"/>
-          </a:xfrm>
-          <a:prstGeom prst="rect">
-            <a:avLst/>
-          </a:prstGeom>
-          <a:noFill/>
-        </p:spPr>
-        <p:txBody>
-          <a:bodyPr wrap="none" lIns="0" rIns="0" tIns="0" bIns="0">
-            <a:noAutofit/>
-          </a:bodyPr>
-          <a:lstStyle/>
-          <a:p>
-            <a:r>
-              <a:rPr sz="1600" b="1">
-                <a:solidFill>
-                  <a:srgbClr val="C1C9C5"/>
-                </a:solidFill>
-                <a:latin typeface="Avenir Next"/>
-                <a:ea typeface="Hiragino Sans"/>
-                <a:cs typeface="Hiragino Sans"/>
-              </a:rPr>
-              <a:t>② 非対角 (i ≠ j)｜H_ij = V_iV_j (G_ij sin θ_ij − B_ij cos θ_ij)</a:t>
-            </a:r>
-          </a:p>
-        </p:txBody>
-      </p:sp>
-      <p:sp>
-        <p:nvSpPr>
-          <p:cNvPr id="7" name="build:ghost"/>
-          <p:cNvSpPr txBox="1"/>
-          <p:nvPr/>
-        </p:nvSpPr>
-        <p:spPr>
-          <a:xfrm>
-            <a:off x="822960" y="3529139"/>
-            <a:ext cx="10801807" cy="695325"/>
-          </a:xfrm>
-          <a:prstGeom prst="rect">
-            <a:avLst/>
-          </a:prstGeom>
-          <a:noFill/>
-        </p:spPr>
-        <p:txBody>
-          <a:bodyPr wrap="square" lIns="0" rIns="0" tIns="0" bIns="0">
-            <a:noAutofit/>
-          </a:bodyPr>
-          <a:lstStyle/>
-          <a:p>
-            <a:pPr>
-              <a:lnSpc>
-                <a:spcPct val="130000"/>
-              </a:lnSpc>
-            </a:pPr>
-            <a:r>
-              <a:rPr sz="1500">
-                <a:solidFill>
-                  <a:srgbClr val="C1BCBB"/>
-                </a:solidFill>
-                <a:latin typeface="Avenir Next"/>
-                <a:ea typeface="Hiragino Sans"/>
-                <a:cs typeface="Hiragino Sans"/>
-              </a:rPr>
-              <a:t>θ_ij = θ_i − θ_j なので ∂θ_ij/∂θ_j = −1。出てくる式は </a:t>
-            </a:r>
-            <a:r>
-              <a:rPr sz="1500" b="1">
-                <a:solidFill>
-                  <a:srgbClr val="C1BCBB"/>
-                </a:solidFill>
-                <a:latin typeface="Avenir Next"/>
-                <a:ea typeface="Hiragino Sans"/>
-                <a:cs typeface="Hiragino Sans"/>
-              </a:rPr>
-              <a:t>Q_i の j 番目の項そのもの</a:t>
-            </a:r>
-            <a:r>
-              <a:rPr sz="1500">
-                <a:solidFill>
-                  <a:srgbClr val="C1BCBB"/>
-                </a:solidFill>
-                <a:latin typeface="Avenir Next"/>
-                <a:ea typeface="Hiragino Sans"/>
-                <a:cs typeface="Hiragino Sans"/>
-              </a:rPr>
-              <a:t>。同様に N_ij = V_iV_j (G_ij cos θ_ij + B_ij sin θ_ij)、M_ij = −N_ij、L_ij = H_ij。</a:t>
-            </a:r>
-          </a:p>
-        </p:txBody>
-      </p:sp>
-      <p:sp>
-        <p:nvSpPr>
-          <p:cNvPr id="8" name="Rectangle 7"/>
-          <p:cNvSpPr/>
-          <p:nvPr/>
-        </p:nvSpPr>
-        <p:spPr>
-          <a:xfrm>
-            <a:off x="566928" y="4376356"/>
-            <a:ext cx="11057839" cy="9525"/>
-          </a:xfrm>
-          <a:prstGeom prst="rect">
-            <a:avLst/>
-          </a:prstGeom>
-          <a:solidFill>
-            <a:srgbClr val="E5DCCE"/>
-          </a:solidFill>
-          <a:ln>
-            <a:noFill/>
-          </a:ln>
-          <a:effectLst/>
-        </p:spPr>
-        <p:style>
-          <a:lnRef idx="1">
-            <a:schemeClr val="accent1"/>
-          </a:lnRef>
-          <a:fillRef idx="3">
-            <a:schemeClr val="accent1"/>
-          </a:fillRef>
-          <a:effectRef idx="2">
-            <a:schemeClr val="accent1"/>
-          </a:effectRef>
-          <a:fontRef idx="minor">
-            <a:schemeClr val="lt1"/>
-          </a:fontRef>
-        </p:style>
-        <p:txBody>
-          <a:bodyPr rtlCol="0" anchor="ctr"/>
-          <a:lstStyle/>
-          <a:p>
-            <a:pPr algn="ctr"/>
-          </a:p>
-        </p:txBody>
-      </p:sp>
-      <p:sp>
-        <p:nvSpPr>
-          <p:cNvPr id="9" name="build:ghost"/>
-          <p:cNvSpPr txBox="1"/>
-          <p:nvPr/>
-        </p:nvSpPr>
-        <p:spPr>
-          <a:xfrm>
-            <a:off x="566928" y="4553648"/>
-            <a:ext cx="11057839" cy="254000"/>
-          </a:xfrm>
-          <a:prstGeom prst="rect">
-            <a:avLst/>
-          </a:prstGeom>
-          <a:noFill/>
-        </p:spPr>
-        <p:txBody>
-          <a:bodyPr wrap="none" lIns="0" rIns="0" tIns="0" bIns="0">
-            <a:noAutofit/>
-          </a:bodyPr>
-          <a:lstStyle/>
-          <a:p>
-            <a:r>
-              <a:rPr sz="1600" b="1">
-                <a:solidFill>
-                  <a:srgbClr val="C1C9C5"/>
-                </a:solidFill>
-                <a:latin typeface="Avenir Next"/>
-                <a:ea typeface="Hiragino Sans"/>
-                <a:cs typeface="Hiragino Sans"/>
-              </a:rPr>
-              <a:t>③ 対角 (i = j)｜H_ii = −Q_i − B_ii V_i²、L_ii = Q_i − B_ii V_i²</a:t>
-            </a:r>
-          </a:p>
-        </p:txBody>
-      </p:sp>
-      <p:sp>
-        <p:nvSpPr>
-          <p:cNvPr id="10" name="build:ghost"/>
-          <p:cNvSpPr txBox="1"/>
-          <p:nvPr/>
-        </p:nvSpPr>
-        <p:spPr>
-          <a:xfrm>
-            <a:off x="822960" y="4845748"/>
-            <a:ext cx="10801807" cy="695325"/>
-          </a:xfrm>
-          <a:prstGeom prst="rect">
-            <a:avLst/>
-          </a:prstGeom>
-          <a:noFill/>
-        </p:spPr>
-        <p:txBody>
-          <a:bodyPr wrap="square" lIns="0" rIns="0" tIns="0" bIns="0">
-            <a:noAutofit/>
-          </a:bodyPr>
-          <a:lstStyle/>
-          <a:p>
-            <a:pPr>
-              <a:lnSpc>
-                <a:spcPct val="130000"/>
-              </a:lnSpc>
-            </a:pPr>
-            <a:r>
-              <a:rPr sz="1500">
-                <a:solidFill>
-                  <a:srgbClr val="C1BCBB"/>
-                </a:solidFill>
-                <a:latin typeface="Avenir Next"/>
-                <a:ea typeface="Hiragino Sans"/>
-                <a:cs typeface="Hiragino Sans"/>
-              </a:rPr>
-              <a:t>N_ii = P_i + G_ii V_i²、M_ii = P_i − G_ii V_i²。</a:t>
-            </a:r>
-            <a:r>
-              <a:rPr sz="1500" b="1">
-                <a:solidFill>
-                  <a:srgbClr val="C1BCBB"/>
-                </a:solidFill>
-                <a:latin typeface="Avenir Next"/>
-                <a:ea typeface="Hiragino Sans"/>
-                <a:cs typeface="Hiragino Sans"/>
-              </a:rPr>
-              <a:t>対角は P_i, Q_i で書ける</a:t>
-            </a:r>
-            <a:r>
-              <a:rPr sz="1500">
-                <a:solidFill>
-                  <a:srgbClr val="C1BCBB"/>
-                </a:solidFill>
-                <a:latin typeface="Avenir Next"/>
-                <a:ea typeface="Hiragino Sans"/>
-                <a:cs typeface="Hiragino Sans"/>
-              </a:rPr>
-              <a:t>ので、ミスマッチを計算したときの P_i, Q_i をそのまま使い回せる。</a:t>
-            </a:r>
-          </a:p>
-        </p:txBody>
-      </p:sp>
-      <p:sp>
-        <p:nvSpPr>
-          <p:cNvPr id="11" name="TextBox 10"/>
+            <a:r>
+              <a:rPr sz="1400">
+                <a:solidFill>
+                  <a:srgbClr val="71635B"/>
+                </a:solidFill>
+                <a:latin typeface="Avenir Next"/>
+                <a:ea typeface="Hiragino Sans"/>
+                <a:cs typeface="Hiragino Sans"/>
+              </a:rPr>
+              <a:t>P_i = V_i Σ_j V_j (G_ij cos θ_ij + B_ij sin θ_ij) を θ_j と V_j で微分する。H = ∂P/∂θ、N = V∂P/∂V、M = ∂Q/∂θ、L = V∂Q/∂V。V は ΔV/V で正規化すると式が対称になる。　出典｜コード/fig_ch05.py</a:t>
+            </a:r>
+          </a:p>
+        </p:txBody>
+      </p:sp>
+      <p:sp>
+        <p:nvSpPr>
+          <p:cNvPr id="5" name="TextBox 4"/>
           <p:cNvSpPr txBox="1"/>
           <p:nvPr/>
         </p:nvSpPr>
@@ -11207,59 +10182,14 @@
       <p:grpSpPr/>
       <p:sp>
         <p:nvSpPr>
-          <p:cNvPr id="2" name="TextBox 1"/>
+          <p:cNvPr id="2" name="edge:title"/>
           <p:cNvSpPr txBox="1"/>
           <p:nvPr/>
         </p:nvSpPr>
         <p:spPr>
           <a:xfrm>
-            <a:off x="566928" y="457200"/>
-            <a:ext cx="11057839" cy="658368"/>
-          </a:xfrm>
-          <a:prstGeom prst="rect">
-            <a:avLst/>
-          </a:prstGeom>
-          <a:noFill/>
-        </p:spPr>
-        <p:txBody>
-          <a:bodyPr wrap="square" lIns="0" rIns="0" tIns="0" bIns="0" anchor="ctr">
-            <a:noAutofit/>
-          </a:bodyPr>
-          <a:lstStyle/>
-          <a:p>
-            <a:pPr>
-              <a:lnSpc>
-                <a:spcPct val="106000"/>
-              </a:lnSpc>
-              <a:defRPr sz="3390" b="1">
-                <a:solidFill>
-                  <a:srgbClr val="7C332A"/>
-                </a:solidFill>
-                <a:latin typeface="Avenir Next"/>
-                <a:ea typeface="Hiragino Sans"/>
-                <a:cs typeface="Hiragino Sans"/>
-              </a:defRPr>
-            </a:pPr>
-            <a:r>
-              <a:rPr>
-                <a:ea typeface="Hiragino Sans"/>
-                <a:cs typeface="Hiragino Sans"/>
-              </a:rPr>
-              <a:t>導出 — ヤコビアンの 4 ブロック</a:t>
-            </a:r>
-          </a:p>
-        </p:txBody>
-      </p:sp>
-      <p:sp>
-        <p:nvSpPr>
-          <p:cNvPr id="3" name="TextBox 2"/>
-          <p:cNvSpPr txBox="1"/>
-          <p:nvPr/>
-        </p:nvSpPr>
-        <p:spPr>
-          <a:xfrm>
-            <a:off x="566928" y="1920430"/>
-            <a:ext cx="11057839" cy="254000"/>
+            <a:off x="566928" y="146304"/>
+            <a:ext cx="11057839" cy="457200"/>
           </a:xfrm>
           <a:prstGeom prst="rect">
             <a:avLst/>
@@ -11272,30 +10202,60 @@
           </a:bodyPr>
           <a:lstStyle/>
           <a:p>
-            <a:r>
-              <a:rPr sz="1600" b="1">
-                <a:solidFill>
-                  <a:srgbClr val="5C7268"/>
-                </a:solidFill>
-                <a:latin typeface="Avenir Next"/>
-                <a:ea typeface="Hiragino Sans"/>
-                <a:cs typeface="Hiragino Sans"/>
-              </a:rPr>
-              <a:t>① 何を何で微分するか｜未知数 (θ, V)、式 (ΔP, ΔQ)</a:t>
-            </a:r>
-          </a:p>
-        </p:txBody>
-      </p:sp>
-      <p:sp>
-        <p:nvSpPr>
-          <p:cNvPr id="4" name="TextBox 3"/>
+            <a:pPr>
+              <a:defRPr sz="2400" b="1">
+                <a:solidFill>
+                  <a:srgbClr val="7C332A"/>
+                </a:solidFill>
+                <a:latin typeface="Avenir Next"/>
+                <a:ea typeface="Hiragino Sans"/>
+                <a:cs typeface="Hiragino Sans"/>
+              </a:defRPr>
+            </a:pPr>
+            <a:r>
+              <a:rPr>
+                <a:ea typeface="Hiragino Sans"/>
+                <a:cs typeface="Hiragino Sans"/>
+              </a:rPr>
+              <a:t>導出 — ヤコビアンの 4 ブロック</a:t>
+            </a:r>
+          </a:p>
+        </p:txBody>
+      </p:sp>
+      <p:pic>
+        <p:nvPicPr>
+          <p:cNvPr id="3" name="Picture 2" descr="ch05_deriv_jacobian_2.png"/>
+          <p:cNvPicPr>
+            <a:picLocks noChangeAspect="1"/>
+          </p:cNvPicPr>
+          <p:nvPr/>
+        </p:nvPicPr>
+        <p:blipFill>
+          <a:blip r:embed="rId2"/>
+          <a:stretch>
+            <a:fillRect/>
+          </a:stretch>
+        </p:blipFill>
+        <p:spPr>
+          <a:xfrm>
+            <a:off x="644090" y="713232"/>
+            <a:ext cx="10903514" cy="5322316"/>
+          </a:xfrm>
+          <a:prstGeom prst="rect">
+            <a:avLst/>
+          </a:prstGeom>
+        </p:spPr>
+      </p:pic>
+      <p:sp>
+        <p:nvSpPr>
+          <p:cNvPr id="4" name="edge:caption"/>
           <p:cNvSpPr txBox="1"/>
           <p:nvPr/>
         </p:nvSpPr>
         <p:spPr>
           <a:xfrm>
-            <a:off x="822960" y="2212530"/>
-            <a:ext cx="10801807" cy="695325"/>
+            <a:off x="228600" y="6090412"/>
+            <a:ext cx="11734495" cy="520700"/>
           </a:xfrm>
           <a:prstGeom prst="rect">
             <a:avLst/>
@@ -11308,336 +10268,24 @@
           </a:bodyPr>
           <a:lstStyle/>
           <a:p>
-            <a:pPr>
-              <a:lnSpc>
-                <a:spcPct val="130000"/>
-              </a:lnSpc>
-            </a:pPr>
-            <a:r>
-              <a:rPr sz="1500">
-                <a:solidFill>
-                  <a:srgbClr val="33221E"/>
-                </a:solidFill>
-                <a:latin typeface="Avenir Next"/>
-                <a:ea typeface="Hiragino Sans"/>
-                <a:cs typeface="Hiragino Sans"/>
-              </a:rPr>
-              <a:t>P_i = V_i Σ_j V_j (G_ij cos θ_ij + B_ij sin θ_ij) を θ_j と V_j で微分する。</a:t>
-            </a:r>
-            <a:r>
-              <a:rPr sz="1500" b="1">
-                <a:solidFill>
-                  <a:srgbClr val="33221E"/>
-                </a:solidFill>
-                <a:latin typeface="Avenir Next"/>
-                <a:ea typeface="Hiragino Sans"/>
-                <a:cs typeface="Hiragino Sans"/>
-              </a:rPr>
-              <a:t>H = ∂P/∂θ、N = V∂P/∂V、M = ∂Q/∂θ、L = V∂Q/∂V</a:t>
-            </a:r>
-            <a:r>
-              <a:rPr sz="1500">
-                <a:solidFill>
-                  <a:srgbClr val="33221E"/>
-                </a:solidFill>
-                <a:latin typeface="Avenir Next"/>
-                <a:ea typeface="Hiragino Sans"/>
-                <a:cs typeface="Hiragino Sans"/>
-              </a:rPr>
-              <a:t>。V は ΔV/V で正規化すると式が対称になる。</a:t>
-            </a:r>
-          </a:p>
-        </p:txBody>
-      </p:sp>
-      <p:sp>
-        <p:nvSpPr>
-          <p:cNvPr id="5" name="Rectangle 4"/>
-          <p:cNvSpPr/>
-          <p:nvPr/>
-        </p:nvSpPr>
-        <p:spPr>
-          <a:xfrm>
-            <a:off x="566928" y="3059747"/>
-            <a:ext cx="11057839" cy="9525"/>
-          </a:xfrm>
-          <a:prstGeom prst="rect">
-            <a:avLst/>
-          </a:prstGeom>
-          <a:solidFill>
-            <a:srgbClr val="E5DCCE"/>
-          </a:solidFill>
-          <a:ln>
-            <a:noFill/>
-          </a:ln>
-          <a:effectLst/>
-        </p:spPr>
-        <p:style>
-          <a:lnRef idx="1">
-            <a:schemeClr val="accent1"/>
-          </a:lnRef>
-          <a:fillRef idx="3">
-            <a:schemeClr val="accent1"/>
-          </a:fillRef>
-          <a:effectRef idx="2">
-            <a:schemeClr val="accent1"/>
-          </a:effectRef>
-          <a:fontRef idx="minor">
-            <a:schemeClr val="lt1"/>
-          </a:fontRef>
-        </p:style>
-        <p:txBody>
-          <a:bodyPr rtlCol="0" anchor="ctr"/>
-          <a:lstStyle/>
-          <a:p>
             <a:pPr algn="ctr"/>
-          </a:p>
-        </p:txBody>
-      </p:sp>
-      <p:sp>
-        <p:nvSpPr>
-          <p:cNvPr id="6" name="TextBox 5"/>
-          <p:cNvSpPr txBox="1"/>
-          <p:nvPr/>
-        </p:nvSpPr>
-        <p:spPr>
-          <a:xfrm>
-            <a:off x="566928" y="3237039"/>
-            <a:ext cx="11057839" cy="254000"/>
-          </a:xfrm>
-          <a:prstGeom prst="rect">
-            <a:avLst/>
-          </a:prstGeom>
-          <a:noFill/>
-        </p:spPr>
-        <p:txBody>
-          <a:bodyPr wrap="none" lIns="0" rIns="0" tIns="0" bIns="0">
-            <a:noAutofit/>
-          </a:bodyPr>
-          <a:lstStyle/>
-          <a:p>
-            <a:r>
-              <a:rPr sz="1600" b="1">
-                <a:solidFill>
-                  <a:srgbClr val="5C7268"/>
-                </a:solidFill>
-                <a:latin typeface="Avenir Next"/>
-                <a:ea typeface="Hiragino Sans"/>
-                <a:cs typeface="Hiragino Sans"/>
-              </a:rPr>
-              <a:t>② 非対角 (i ≠ j)｜H_ij = V_iV_j (G_ij sin θ_ij − B_ij cos θ_ij)</a:t>
-            </a:r>
-          </a:p>
-        </p:txBody>
-      </p:sp>
-      <p:sp>
-        <p:nvSpPr>
-          <p:cNvPr id="7" name="TextBox 6"/>
-          <p:cNvSpPr txBox="1"/>
-          <p:nvPr/>
-        </p:nvSpPr>
-        <p:spPr>
-          <a:xfrm>
-            <a:off x="822960" y="3529139"/>
-            <a:ext cx="10801807" cy="695325"/>
-          </a:xfrm>
-          <a:prstGeom prst="rect">
-            <a:avLst/>
-          </a:prstGeom>
-          <a:noFill/>
-        </p:spPr>
-        <p:txBody>
-          <a:bodyPr wrap="square" lIns="0" rIns="0" tIns="0" bIns="0">
-            <a:noAutofit/>
-          </a:bodyPr>
-          <a:lstStyle/>
-          <a:p>
-            <a:pPr>
-              <a:lnSpc>
-                <a:spcPct val="130000"/>
-              </a:lnSpc>
-            </a:pPr>
-            <a:r>
-              <a:rPr sz="1500">
-                <a:solidFill>
-                  <a:srgbClr val="33221E"/>
-                </a:solidFill>
-                <a:latin typeface="Avenir Next"/>
-                <a:ea typeface="Hiragino Sans"/>
-                <a:cs typeface="Hiragino Sans"/>
-              </a:rPr>
-              <a:t>θ_ij = θ_i − θ_j なので ∂θ_ij/∂θ_j = −1。出てくる式は </a:t>
-            </a:r>
-            <a:r>
-              <a:rPr sz="1500" b="1">
-                <a:solidFill>
-                  <a:srgbClr val="33221E"/>
-                </a:solidFill>
-                <a:latin typeface="Avenir Next"/>
-                <a:ea typeface="Hiragino Sans"/>
-                <a:cs typeface="Hiragino Sans"/>
-              </a:rPr>
-              <a:t>Q_i の j 番目の項そのもの</a:t>
-            </a:r>
-            <a:r>
-              <a:rPr sz="1500">
-                <a:solidFill>
-                  <a:srgbClr val="33221E"/>
-                </a:solidFill>
-                <a:latin typeface="Avenir Next"/>
-                <a:ea typeface="Hiragino Sans"/>
-                <a:cs typeface="Hiragino Sans"/>
-              </a:rPr>
-              <a:t>。同様に N_ij = V_iV_j (G_ij cos θ_ij + B_ij sin θ_ij)、M_ij = −N_ij、L_ij = H_ij。</a:t>
-            </a:r>
-          </a:p>
-        </p:txBody>
-      </p:sp>
-      <p:sp>
-        <p:nvSpPr>
-          <p:cNvPr id="8" name="Rectangle 7"/>
-          <p:cNvSpPr/>
-          <p:nvPr/>
-        </p:nvSpPr>
-        <p:spPr>
-          <a:xfrm>
-            <a:off x="566928" y="4376356"/>
-            <a:ext cx="11057839" cy="9525"/>
-          </a:xfrm>
-          <a:prstGeom prst="rect">
-            <a:avLst/>
-          </a:prstGeom>
-          <a:solidFill>
-            <a:srgbClr val="E5DCCE"/>
-          </a:solidFill>
-          <a:ln>
-            <a:noFill/>
-          </a:ln>
-          <a:effectLst/>
-        </p:spPr>
-        <p:style>
-          <a:lnRef idx="1">
-            <a:schemeClr val="accent1"/>
-          </a:lnRef>
-          <a:fillRef idx="3">
-            <a:schemeClr val="accent1"/>
-          </a:fillRef>
-          <a:effectRef idx="2">
-            <a:schemeClr val="accent1"/>
-          </a:effectRef>
-          <a:fontRef idx="minor">
-            <a:schemeClr val="lt1"/>
-          </a:fontRef>
-        </p:style>
-        <p:txBody>
-          <a:bodyPr rtlCol="0" anchor="ctr"/>
-          <a:lstStyle/>
-          <a:p>
-            <a:pPr algn="ctr"/>
-          </a:p>
-        </p:txBody>
-      </p:sp>
-      <p:sp>
-        <p:nvSpPr>
-          <p:cNvPr id="9" name="build:ghost"/>
-          <p:cNvSpPr txBox="1"/>
-          <p:nvPr/>
-        </p:nvSpPr>
-        <p:spPr>
-          <a:xfrm>
-            <a:off x="566928" y="4553648"/>
-            <a:ext cx="11057839" cy="254000"/>
-          </a:xfrm>
-          <a:prstGeom prst="rect">
-            <a:avLst/>
-          </a:prstGeom>
-          <a:noFill/>
-        </p:spPr>
-        <p:txBody>
-          <a:bodyPr wrap="none" lIns="0" rIns="0" tIns="0" bIns="0">
-            <a:noAutofit/>
-          </a:bodyPr>
-          <a:lstStyle/>
-          <a:p>
-            <a:r>
-              <a:rPr sz="1600" b="1">
-                <a:solidFill>
-                  <a:srgbClr val="C1C9C5"/>
-                </a:solidFill>
-                <a:latin typeface="Avenir Next"/>
-                <a:ea typeface="Hiragino Sans"/>
-                <a:cs typeface="Hiragino Sans"/>
-              </a:rPr>
-              <a:t>③ 対角 (i = j)｜H_ii = −Q_i − B_ii V_i²、L_ii = Q_i − B_ii V_i²</a:t>
-            </a:r>
-          </a:p>
-        </p:txBody>
-      </p:sp>
-      <p:sp>
-        <p:nvSpPr>
-          <p:cNvPr id="10" name="build:ghost"/>
-          <p:cNvSpPr txBox="1"/>
-          <p:nvPr/>
-        </p:nvSpPr>
-        <p:spPr>
-          <a:xfrm>
-            <a:off x="822960" y="4845748"/>
-            <a:ext cx="10801807" cy="695325"/>
-          </a:xfrm>
-          <a:prstGeom prst="rect">
-            <a:avLst/>
-          </a:prstGeom>
-          <a:noFill/>
-        </p:spPr>
-        <p:txBody>
-          <a:bodyPr wrap="square" lIns="0" rIns="0" tIns="0" bIns="0">
-            <a:noAutofit/>
-          </a:bodyPr>
-          <a:lstStyle/>
-          <a:p>
-            <a:pPr>
-              <a:lnSpc>
-                <a:spcPct val="130000"/>
-              </a:lnSpc>
-            </a:pPr>
-            <a:r>
-              <a:rPr sz="1500">
-                <a:solidFill>
-                  <a:srgbClr val="C1BCBB"/>
-                </a:solidFill>
-                <a:latin typeface="Avenir Next"/>
-                <a:ea typeface="Hiragino Sans"/>
-                <a:cs typeface="Hiragino Sans"/>
-              </a:rPr>
-              <a:t>N_ii = P_i + G_ii V_i²、M_ii = P_i − G_ii V_i²。</a:t>
-            </a:r>
-            <a:r>
-              <a:rPr sz="1500" b="1">
-                <a:solidFill>
-                  <a:srgbClr val="C1BCBB"/>
-                </a:solidFill>
-                <a:latin typeface="Avenir Next"/>
-                <a:ea typeface="Hiragino Sans"/>
-                <a:cs typeface="Hiragino Sans"/>
-              </a:rPr>
-              <a:t>対角は P_i, Q_i で書ける</a:t>
-            </a:r>
-            <a:r>
-              <a:rPr sz="1500">
-                <a:solidFill>
-                  <a:srgbClr val="C1BCBB"/>
-                </a:solidFill>
-                <a:latin typeface="Avenir Next"/>
-                <a:ea typeface="Hiragino Sans"/>
-                <a:cs typeface="Hiragino Sans"/>
-              </a:rPr>
-              <a:t>ので、ミスマッチを計算したときの P_i, Q_i をそのまま使い回せる。</a:t>
-            </a:r>
-          </a:p>
-        </p:txBody>
-      </p:sp>
-      <p:sp>
-        <p:nvSpPr>
-          <p:cNvPr id="11" name="TextBox 10"/>
+            <a:r>
+              <a:rPr sz="1400">
+                <a:solidFill>
+                  <a:srgbClr val="71635B"/>
+                </a:solidFill>
+                <a:latin typeface="Avenir Next"/>
+                <a:ea typeface="Hiragino Sans"/>
+                <a:cs typeface="Hiragino Sans"/>
+              </a:rPr>
+              <a:t>θ_ij = θ_i − θ_j なので ∂θ_ij/∂θ_j = −1。出てくる式は Q_i の j 番目の項そのもの。同様に N_ij = V_iV_j (G_ij cos θ_ij + B_ij sin θ_ij)、M_ij = −N_ij、L_ij = H_ij。　出典｜コード/fig_ch05.py</a:t>
+            </a:r>
+          </a:p>
+        </p:txBody>
+      </p:sp>
+      <p:sp>
+        <p:nvSpPr>
+          <p:cNvPr id="5" name="TextBox 4"/>
           <p:cNvSpPr txBox="1"/>
           <p:nvPr/>
         </p:nvSpPr>
@@ -11693,59 +10341,14 @@
       <p:grpSpPr/>
       <p:sp>
         <p:nvSpPr>
-          <p:cNvPr id="2" name="TextBox 1"/>
+          <p:cNvPr id="2" name="edge:title"/>
           <p:cNvSpPr txBox="1"/>
           <p:nvPr/>
         </p:nvSpPr>
         <p:spPr>
           <a:xfrm>
-            <a:off x="566928" y="457200"/>
-            <a:ext cx="11057839" cy="658368"/>
-          </a:xfrm>
-          <a:prstGeom prst="rect">
-            <a:avLst/>
-          </a:prstGeom>
-          <a:noFill/>
-        </p:spPr>
-        <p:txBody>
-          <a:bodyPr wrap="square" lIns="0" rIns="0" tIns="0" bIns="0" anchor="ctr">
-            <a:noAutofit/>
-          </a:bodyPr>
-          <a:lstStyle/>
-          <a:p>
-            <a:pPr>
-              <a:lnSpc>
-                <a:spcPct val="106000"/>
-              </a:lnSpc>
-              <a:defRPr sz="3390" b="1">
-                <a:solidFill>
-                  <a:srgbClr val="7C332A"/>
-                </a:solidFill>
-                <a:latin typeface="Avenir Next"/>
-                <a:ea typeface="Hiragino Sans"/>
-                <a:cs typeface="Hiragino Sans"/>
-              </a:defRPr>
-            </a:pPr>
-            <a:r>
-              <a:rPr>
-                <a:ea typeface="Hiragino Sans"/>
-                <a:cs typeface="Hiragino Sans"/>
-              </a:rPr>
-              <a:t>導出 — ヤコビアンの 4 ブロック</a:t>
-            </a:r>
-          </a:p>
-        </p:txBody>
-      </p:sp>
-      <p:sp>
-        <p:nvSpPr>
-          <p:cNvPr id="3" name="TextBox 2"/>
-          <p:cNvSpPr txBox="1"/>
-          <p:nvPr/>
-        </p:nvSpPr>
-        <p:spPr>
-          <a:xfrm>
-            <a:off x="566928" y="1920430"/>
-            <a:ext cx="11057839" cy="254000"/>
+            <a:off x="566928" y="146304"/>
+            <a:ext cx="11057839" cy="457200"/>
           </a:xfrm>
           <a:prstGeom prst="rect">
             <a:avLst/>
@@ -11758,30 +10361,60 @@
           </a:bodyPr>
           <a:lstStyle/>
           <a:p>
-            <a:r>
-              <a:rPr sz="1600" b="1">
-                <a:solidFill>
-                  <a:srgbClr val="5C7268"/>
-                </a:solidFill>
-                <a:latin typeface="Avenir Next"/>
-                <a:ea typeface="Hiragino Sans"/>
-                <a:cs typeface="Hiragino Sans"/>
-              </a:rPr>
-              <a:t>① 何を何で微分するか｜未知数 (θ, V)、式 (ΔP, ΔQ)</a:t>
-            </a:r>
-          </a:p>
-        </p:txBody>
-      </p:sp>
-      <p:sp>
-        <p:nvSpPr>
-          <p:cNvPr id="4" name="TextBox 3"/>
+            <a:pPr>
+              <a:defRPr sz="2400" b="1">
+                <a:solidFill>
+                  <a:srgbClr val="7C332A"/>
+                </a:solidFill>
+                <a:latin typeface="Avenir Next"/>
+                <a:ea typeface="Hiragino Sans"/>
+                <a:cs typeface="Hiragino Sans"/>
+              </a:defRPr>
+            </a:pPr>
+            <a:r>
+              <a:rPr>
+                <a:ea typeface="Hiragino Sans"/>
+                <a:cs typeface="Hiragino Sans"/>
+              </a:rPr>
+              <a:t>導出 — ヤコビアンの 4 ブロック</a:t>
+            </a:r>
+          </a:p>
+        </p:txBody>
+      </p:sp>
+      <p:pic>
+        <p:nvPicPr>
+          <p:cNvPr id="3" name="Picture 2" descr="ch05_deriv_jacobian_3.png"/>
+          <p:cNvPicPr>
+            <a:picLocks noChangeAspect="1"/>
+          </p:cNvPicPr>
+          <p:nvPr/>
+        </p:nvPicPr>
+        <p:blipFill>
+          <a:blip r:embed="rId2"/>
+          <a:stretch>
+            <a:fillRect/>
+          </a:stretch>
+        </p:blipFill>
+        <p:spPr>
+          <a:xfrm>
+            <a:off x="644090" y="713232"/>
+            <a:ext cx="10903514" cy="5322316"/>
+          </a:xfrm>
+          <a:prstGeom prst="rect">
+            <a:avLst/>
+          </a:prstGeom>
+        </p:spPr>
+      </p:pic>
+      <p:sp>
+        <p:nvSpPr>
+          <p:cNvPr id="4" name="edge:caption"/>
           <p:cNvSpPr txBox="1"/>
           <p:nvPr/>
         </p:nvSpPr>
         <p:spPr>
           <a:xfrm>
-            <a:off x="822960" y="2212530"/>
-            <a:ext cx="10801807" cy="695325"/>
+            <a:off x="228600" y="6090412"/>
+            <a:ext cx="11734495" cy="520700"/>
           </a:xfrm>
           <a:prstGeom prst="rect">
             <a:avLst/>
@@ -11794,336 +10427,24 @@
           </a:bodyPr>
           <a:lstStyle/>
           <a:p>
-            <a:pPr>
-              <a:lnSpc>
-                <a:spcPct val="130000"/>
-              </a:lnSpc>
-            </a:pPr>
-            <a:r>
-              <a:rPr sz="1500">
-                <a:solidFill>
-                  <a:srgbClr val="33221E"/>
-                </a:solidFill>
-                <a:latin typeface="Avenir Next"/>
-                <a:ea typeface="Hiragino Sans"/>
-                <a:cs typeface="Hiragino Sans"/>
-              </a:rPr>
-              <a:t>P_i = V_i Σ_j V_j (G_ij cos θ_ij + B_ij sin θ_ij) を θ_j と V_j で微分する。</a:t>
-            </a:r>
-            <a:r>
-              <a:rPr sz="1500" b="1">
-                <a:solidFill>
-                  <a:srgbClr val="33221E"/>
-                </a:solidFill>
-                <a:latin typeface="Avenir Next"/>
-                <a:ea typeface="Hiragino Sans"/>
-                <a:cs typeface="Hiragino Sans"/>
-              </a:rPr>
-              <a:t>H = ∂P/∂θ、N = V∂P/∂V、M = ∂Q/∂θ、L = V∂Q/∂V</a:t>
-            </a:r>
-            <a:r>
-              <a:rPr sz="1500">
-                <a:solidFill>
-                  <a:srgbClr val="33221E"/>
-                </a:solidFill>
-                <a:latin typeface="Avenir Next"/>
-                <a:ea typeface="Hiragino Sans"/>
-                <a:cs typeface="Hiragino Sans"/>
-              </a:rPr>
-              <a:t>。V は ΔV/V で正規化すると式が対称になる。</a:t>
-            </a:r>
-          </a:p>
-        </p:txBody>
-      </p:sp>
-      <p:sp>
-        <p:nvSpPr>
-          <p:cNvPr id="5" name="Rectangle 4"/>
-          <p:cNvSpPr/>
-          <p:nvPr/>
-        </p:nvSpPr>
-        <p:spPr>
-          <a:xfrm>
-            <a:off x="566928" y="3059747"/>
-            <a:ext cx="11057839" cy="9525"/>
-          </a:xfrm>
-          <a:prstGeom prst="rect">
-            <a:avLst/>
-          </a:prstGeom>
-          <a:solidFill>
-            <a:srgbClr val="E5DCCE"/>
-          </a:solidFill>
-          <a:ln>
-            <a:noFill/>
-          </a:ln>
-          <a:effectLst/>
-        </p:spPr>
-        <p:style>
-          <a:lnRef idx="1">
-            <a:schemeClr val="accent1"/>
-          </a:lnRef>
-          <a:fillRef idx="3">
-            <a:schemeClr val="accent1"/>
-          </a:fillRef>
-          <a:effectRef idx="2">
-            <a:schemeClr val="accent1"/>
-          </a:effectRef>
-          <a:fontRef idx="minor">
-            <a:schemeClr val="lt1"/>
-          </a:fontRef>
-        </p:style>
-        <p:txBody>
-          <a:bodyPr rtlCol="0" anchor="ctr"/>
-          <a:lstStyle/>
-          <a:p>
             <a:pPr algn="ctr"/>
-          </a:p>
-        </p:txBody>
-      </p:sp>
-      <p:sp>
-        <p:nvSpPr>
-          <p:cNvPr id="6" name="TextBox 5"/>
-          <p:cNvSpPr txBox="1"/>
-          <p:nvPr/>
-        </p:nvSpPr>
-        <p:spPr>
-          <a:xfrm>
-            <a:off x="566928" y="3237039"/>
-            <a:ext cx="11057839" cy="254000"/>
-          </a:xfrm>
-          <a:prstGeom prst="rect">
-            <a:avLst/>
-          </a:prstGeom>
-          <a:noFill/>
-        </p:spPr>
-        <p:txBody>
-          <a:bodyPr wrap="none" lIns="0" rIns="0" tIns="0" bIns="0">
-            <a:noAutofit/>
-          </a:bodyPr>
-          <a:lstStyle/>
-          <a:p>
-            <a:r>
-              <a:rPr sz="1600" b="1">
-                <a:solidFill>
-                  <a:srgbClr val="5C7268"/>
-                </a:solidFill>
-                <a:latin typeface="Avenir Next"/>
-                <a:ea typeface="Hiragino Sans"/>
-                <a:cs typeface="Hiragino Sans"/>
-              </a:rPr>
-              <a:t>② 非対角 (i ≠ j)｜H_ij = V_iV_j (G_ij sin θ_ij − B_ij cos θ_ij)</a:t>
-            </a:r>
-          </a:p>
-        </p:txBody>
-      </p:sp>
-      <p:sp>
-        <p:nvSpPr>
-          <p:cNvPr id="7" name="TextBox 6"/>
-          <p:cNvSpPr txBox="1"/>
-          <p:nvPr/>
-        </p:nvSpPr>
-        <p:spPr>
-          <a:xfrm>
-            <a:off x="822960" y="3529139"/>
-            <a:ext cx="10801807" cy="695325"/>
-          </a:xfrm>
-          <a:prstGeom prst="rect">
-            <a:avLst/>
-          </a:prstGeom>
-          <a:noFill/>
-        </p:spPr>
-        <p:txBody>
-          <a:bodyPr wrap="square" lIns="0" rIns="0" tIns="0" bIns="0">
-            <a:noAutofit/>
-          </a:bodyPr>
-          <a:lstStyle/>
-          <a:p>
-            <a:pPr>
-              <a:lnSpc>
-                <a:spcPct val="130000"/>
-              </a:lnSpc>
-            </a:pPr>
-            <a:r>
-              <a:rPr sz="1500">
-                <a:solidFill>
-                  <a:srgbClr val="33221E"/>
-                </a:solidFill>
-                <a:latin typeface="Avenir Next"/>
-                <a:ea typeface="Hiragino Sans"/>
-                <a:cs typeface="Hiragino Sans"/>
-              </a:rPr>
-              <a:t>θ_ij = θ_i − θ_j なので ∂θ_ij/∂θ_j = −1。出てくる式は </a:t>
-            </a:r>
-            <a:r>
-              <a:rPr sz="1500" b="1">
-                <a:solidFill>
-                  <a:srgbClr val="33221E"/>
-                </a:solidFill>
-                <a:latin typeface="Avenir Next"/>
-                <a:ea typeface="Hiragino Sans"/>
-                <a:cs typeface="Hiragino Sans"/>
-              </a:rPr>
-              <a:t>Q_i の j 番目の項そのもの</a:t>
-            </a:r>
-            <a:r>
-              <a:rPr sz="1500">
-                <a:solidFill>
-                  <a:srgbClr val="33221E"/>
-                </a:solidFill>
-                <a:latin typeface="Avenir Next"/>
-                <a:ea typeface="Hiragino Sans"/>
-                <a:cs typeface="Hiragino Sans"/>
-              </a:rPr>
-              <a:t>。同様に N_ij = V_iV_j (G_ij cos θ_ij + B_ij sin θ_ij)、M_ij = −N_ij、L_ij = H_ij。</a:t>
-            </a:r>
-          </a:p>
-        </p:txBody>
-      </p:sp>
-      <p:sp>
-        <p:nvSpPr>
-          <p:cNvPr id="8" name="Rectangle 7"/>
-          <p:cNvSpPr/>
-          <p:nvPr/>
-        </p:nvSpPr>
-        <p:spPr>
-          <a:xfrm>
-            <a:off x="566928" y="4376356"/>
-            <a:ext cx="11057839" cy="9525"/>
-          </a:xfrm>
-          <a:prstGeom prst="rect">
-            <a:avLst/>
-          </a:prstGeom>
-          <a:solidFill>
-            <a:srgbClr val="E5DCCE"/>
-          </a:solidFill>
-          <a:ln>
-            <a:noFill/>
-          </a:ln>
-          <a:effectLst/>
-        </p:spPr>
-        <p:style>
-          <a:lnRef idx="1">
-            <a:schemeClr val="accent1"/>
-          </a:lnRef>
-          <a:fillRef idx="3">
-            <a:schemeClr val="accent1"/>
-          </a:fillRef>
-          <a:effectRef idx="2">
-            <a:schemeClr val="accent1"/>
-          </a:effectRef>
-          <a:fontRef idx="minor">
-            <a:schemeClr val="lt1"/>
-          </a:fontRef>
-        </p:style>
-        <p:txBody>
-          <a:bodyPr rtlCol="0" anchor="ctr"/>
-          <a:lstStyle/>
-          <a:p>
-            <a:pPr algn="ctr"/>
-          </a:p>
-        </p:txBody>
-      </p:sp>
-      <p:sp>
-        <p:nvSpPr>
-          <p:cNvPr id="9" name="TextBox 8"/>
-          <p:cNvSpPr txBox="1"/>
-          <p:nvPr/>
-        </p:nvSpPr>
-        <p:spPr>
-          <a:xfrm>
-            <a:off x="566928" y="4553648"/>
-            <a:ext cx="11057839" cy="254000"/>
-          </a:xfrm>
-          <a:prstGeom prst="rect">
-            <a:avLst/>
-          </a:prstGeom>
-          <a:noFill/>
-        </p:spPr>
-        <p:txBody>
-          <a:bodyPr wrap="none" lIns="0" rIns="0" tIns="0" bIns="0">
-            <a:noAutofit/>
-          </a:bodyPr>
-          <a:lstStyle/>
-          <a:p>
-            <a:r>
-              <a:rPr sz="1600" b="1">
-                <a:solidFill>
-                  <a:srgbClr val="5C7268"/>
-                </a:solidFill>
-                <a:latin typeface="Avenir Next"/>
-                <a:ea typeface="Hiragino Sans"/>
-                <a:cs typeface="Hiragino Sans"/>
-              </a:rPr>
-              <a:t>③ 対角 (i = j)｜H_ii = −Q_i − B_ii V_i²、L_ii = Q_i − B_ii V_i²</a:t>
-            </a:r>
-          </a:p>
-        </p:txBody>
-      </p:sp>
-      <p:sp>
-        <p:nvSpPr>
-          <p:cNvPr id="10" name="TextBox 9"/>
-          <p:cNvSpPr txBox="1"/>
-          <p:nvPr/>
-        </p:nvSpPr>
-        <p:spPr>
-          <a:xfrm>
-            <a:off x="822960" y="4845748"/>
-            <a:ext cx="10801807" cy="695325"/>
-          </a:xfrm>
-          <a:prstGeom prst="rect">
-            <a:avLst/>
-          </a:prstGeom>
-          <a:noFill/>
-        </p:spPr>
-        <p:txBody>
-          <a:bodyPr wrap="square" lIns="0" rIns="0" tIns="0" bIns="0">
-            <a:noAutofit/>
-          </a:bodyPr>
-          <a:lstStyle/>
-          <a:p>
-            <a:pPr>
-              <a:lnSpc>
-                <a:spcPct val="130000"/>
-              </a:lnSpc>
-            </a:pPr>
-            <a:r>
-              <a:rPr sz="1500">
-                <a:solidFill>
-                  <a:srgbClr val="33221E"/>
-                </a:solidFill>
-                <a:latin typeface="Avenir Next"/>
-                <a:ea typeface="Hiragino Sans"/>
-                <a:cs typeface="Hiragino Sans"/>
-              </a:rPr>
-              <a:t>N_ii = P_i + G_ii V_i²、M_ii = P_i − G_ii V_i²。</a:t>
-            </a:r>
-            <a:r>
-              <a:rPr sz="1500" b="1">
-                <a:solidFill>
-                  <a:srgbClr val="33221E"/>
-                </a:solidFill>
-                <a:latin typeface="Avenir Next"/>
-                <a:ea typeface="Hiragino Sans"/>
-                <a:cs typeface="Hiragino Sans"/>
-              </a:rPr>
-              <a:t>対角は P_i, Q_i で書ける</a:t>
-            </a:r>
-            <a:r>
-              <a:rPr sz="1500">
-                <a:solidFill>
-                  <a:srgbClr val="33221E"/>
-                </a:solidFill>
-                <a:latin typeface="Avenir Next"/>
-                <a:ea typeface="Hiragino Sans"/>
-                <a:cs typeface="Hiragino Sans"/>
-              </a:rPr>
-              <a:t>ので、ミスマッチを計算したときの P_i, Q_i をそのまま使い回せる。</a:t>
-            </a:r>
-          </a:p>
-        </p:txBody>
-      </p:sp>
-      <p:sp>
-        <p:nvSpPr>
-          <p:cNvPr id="11" name="TextBox 10"/>
+            <a:r>
+              <a:rPr sz="1400">
+                <a:solidFill>
+                  <a:srgbClr val="71635B"/>
+                </a:solidFill>
+                <a:latin typeface="Avenir Next"/>
+                <a:ea typeface="Hiragino Sans"/>
+                <a:cs typeface="Hiragino Sans"/>
+              </a:rPr>
+              <a:t>N_ii = P_i + G_ii V_i²、M_ii = P_i − G_ii V_i²。対角は P_i, Q_i で書けるので、ミスマッチを計算したときの P_i, Q_i をそのまま使い回せる。　出典｜コード/fig_ch05.py</a:t>
+            </a:r>
+          </a:p>
+        </p:txBody>
+      </p:sp>
+      <p:sp>
+        <p:nvSpPr>
+          <p:cNvPr id="5" name="TextBox 4"/>
           <p:cNvSpPr txBox="1"/>
           <p:nvPr/>
         </p:nvSpPr>
@@ -23412,59 +21733,14 @@
       <p:grpSpPr/>
       <p:sp>
         <p:nvSpPr>
-          <p:cNvPr id="2" name="TextBox 1"/>
+          <p:cNvPr id="2" name="edge:title"/>
           <p:cNvSpPr txBox="1"/>
           <p:nvPr/>
         </p:nvSpPr>
         <p:spPr>
           <a:xfrm>
-            <a:off x="566928" y="457200"/>
-            <a:ext cx="11057839" cy="658368"/>
-          </a:xfrm>
-          <a:prstGeom prst="rect">
-            <a:avLst/>
-          </a:prstGeom>
-          <a:noFill/>
-        </p:spPr>
-        <p:txBody>
-          <a:bodyPr wrap="square" lIns="0" rIns="0" tIns="0" bIns="0" anchor="ctr">
-            <a:noAutofit/>
-          </a:bodyPr>
-          <a:lstStyle/>
-          <a:p>
-            <a:pPr>
-              <a:lnSpc>
-                <a:spcPct val="106000"/>
-              </a:lnSpc>
-              <a:defRPr sz="3390" b="1">
-                <a:solidFill>
-                  <a:srgbClr val="7C332A"/>
-                </a:solidFill>
-                <a:latin typeface="Avenir Next"/>
-                <a:ea typeface="Hiragino Sans"/>
-                <a:cs typeface="Hiragino Sans"/>
-              </a:defRPr>
-            </a:pPr>
-            <a:r>
-              <a:rPr>
-                <a:ea typeface="Hiragino Sans"/>
-                <a:cs typeface="Hiragino Sans"/>
-              </a:rPr>
-              <a:t>導出 — なぜ 2 次収束するのか</a:t>
-            </a:r>
-          </a:p>
-        </p:txBody>
-      </p:sp>
-      <p:sp>
-        <p:nvSpPr>
-          <p:cNvPr id="3" name="TextBox 2"/>
-          <p:cNvSpPr txBox="1"/>
-          <p:nvPr/>
-        </p:nvSpPr>
-        <p:spPr>
-          <a:xfrm>
-            <a:off x="566928" y="2229993"/>
-            <a:ext cx="11057839" cy="254000"/>
+            <a:off x="566928" y="146304"/>
+            <a:ext cx="11057839" cy="457200"/>
           </a:xfrm>
           <a:prstGeom prst="rect">
             <a:avLst/>
@@ -23477,30 +21753,60 @@
           </a:bodyPr>
           <a:lstStyle/>
           <a:p>
-            <a:r>
-              <a:rPr sz="1600" b="1">
-                <a:solidFill>
-                  <a:srgbClr val="5C7268"/>
-                </a:solidFill>
-                <a:latin typeface="Avenir Next"/>
-                <a:ea typeface="Hiragino Sans"/>
-                <a:cs typeface="Hiragino Sans"/>
-              </a:rPr>
-              <a:t>① テイラー展開｜f(x + Δx) ≈ f(x) + f′(x) Δx</a:t>
-            </a:r>
-          </a:p>
-        </p:txBody>
-      </p:sp>
-      <p:sp>
-        <p:nvSpPr>
-          <p:cNvPr id="4" name="TextBox 3"/>
+            <a:pPr>
+              <a:defRPr sz="2400" b="1">
+                <a:solidFill>
+                  <a:srgbClr val="7C332A"/>
+                </a:solidFill>
+                <a:latin typeface="Avenir Next"/>
+                <a:ea typeface="Hiragino Sans"/>
+                <a:cs typeface="Hiragino Sans"/>
+              </a:defRPr>
+            </a:pPr>
+            <a:r>
+              <a:rPr>
+                <a:ea typeface="Hiragino Sans"/>
+                <a:cs typeface="Hiragino Sans"/>
+              </a:rPr>
+              <a:t>導出 — なぜ 2 次収束するのか</a:t>
+            </a:r>
+          </a:p>
+        </p:txBody>
+      </p:sp>
+      <p:pic>
+        <p:nvPicPr>
+          <p:cNvPr id="3" name="Picture 2" descr="ch05_deriv_quad_1.png"/>
+          <p:cNvPicPr>
+            <a:picLocks noChangeAspect="1"/>
+          </p:cNvPicPr>
+          <p:nvPr/>
+        </p:nvPicPr>
+        <p:blipFill>
+          <a:blip r:embed="rId2"/>
+          <a:stretch>
+            <a:fillRect/>
+          </a:stretch>
+        </p:blipFill>
+        <p:spPr>
+          <a:xfrm>
+            <a:off x="551856" y="713232"/>
+            <a:ext cx="11087983" cy="5532120"/>
+          </a:xfrm>
+          <a:prstGeom prst="rect">
+            <a:avLst/>
+          </a:prstGeom>
+        </p:spPr>
+      </p:pic>
+      <p:sp>
+        <p:nvSpPr>
+          <p:cNvPr id="4" name="edge:caption"/>
           <p:cNvSpPr txBox="1"/>
           <p:nvPr/>
         </p:nvSpPr>
         <p:spPr>
           <a:xfrm>
-            <a:off x="822960" y="2522093"/>
-            <a:ext cx="10801807" cy="385762"/>
+            <a:off x="228600" y="6300216"/>
+            <a:ext cx="11734495" cy="310896"/>
           </a:xfrm>
           <a:prstGeom prst="rect">
             <a:avLst/>
@@ -23513,358 +21819,24 @@
           </a:bodyPr>
           <a:lstStyle/>
           <a:p>
-            <a:pPr>
-              <a:lnSpc>
-                <a:spcPct val="130000"/>
-              </a:lnSpc>
-            </a:pPr>
-            <a:r>
-              <a:rPr sz="1500">
-                <a:solidFill>
-                  <a:srgbClr val="33221E"/>
-                </a:solidFill>
-                <a:latin typeface="Avenir Next"/>
-                <a:ea typeface="Hiragino Sans"/>
-                <a:cs typeface="Hiragino Sans"/>
-              </a:rPr>
-              <a:t>2 次以降を捨てると </a:t>
-            </a:r>
-            <a:r>
-              <a:rPr sz="1500" b="1">
-                <a:solidFill>
-                  <a:srgbClr val="33221E"/>
-                </a:solidFill>
-                <a:latin typeface="Avenir Next"/>
-                <a:ea typeface="Hiragino Sans"/>
-                <a:cs typeface="Hiragino Sans"/>
-              </a:rPr>
-              <a:t>f′(x) Δx = −f(x)</a:t>
-            </a:r>
-            <a:r>
-              <a:rPr sz="1500">
-                <a:solidFill>
-                  <a:srgbClr val="33221E"/>
-                </a:solidFill>
-                <a:latin typeface="Avenir Next"/>
-                <a:ea typeface="Hiragino Sans"/>
-                <a:cs typeface="Hiragino Sans"/>
-              </a:rPr>
-              <a:t>。多変数では f′ が行列 J になり、</a:t>
-            </a:r>
-            <a:r>
-              <a:rPr sz="1500" b="1">
-                <a:solidFill>
-                  <a:srgbClr val="33221E"/>
-                </a:solidFill>
-                <a:latin typeface="Avenir Next"/>
-                <a:ea typeface="Hiragino Sans"/>
-                <a:cs typeface="Hiragino Sans"/>
-              </a:rPr>
-              <a:t>JΔx = −f(x)</a:t>
-            </a:r>
-            <a:r>
-              <a:rPr sz="1500">
-                <a:solidFill>
-                  <a:srgbClr val="33221E"/>
-                </a:solidFill>
-                <a:latin typeface="Avenir Next"/>
-                <a:ea typeface="Hiragino Sans"/>
-                <a:cs typeface="Hiragino Sans"/>
-              </a:rPr>
-              <a:t> が修正方程式。</a:t>
-            </a:r>
-          </a:p>
-        </p:txBody>
-      </p:sp>
-      <p:sp>
-        <p:nvSpPr>
-          <p:cNvPr id="5" name="Rectangle 4"/>
-          <p:cNvSpPr/>
-          <p:nvPr/>
-        </p:nvSpPr>
-        <p:spPr>
-          <a:xfrm>
-            <a:off x="566928" y="3059747"/>
-            <a:ext cx="11057839" cy="9525"/>
-          </a:xfrm>
-          <a:prstGeom prst="rect">
-            <a:avLst/>
-          </a:prstGeom>
-          <a:solidFill>
-            <a:srgbClr val="E5DCCE"/>
-          </a:solidFill>
-          <a:ln>
-            <a:noFill/>
-          </a:ln>
-          <a:effectLst/>
-        </p:spPr>
-        <p:style>
-          <a:lnRef idx="1">
-            <a:schemeClr val="accent1"/>
-          </a:lnRef>
-          <a:fillRef idx="3">
-            <a:schemeClr val="accent1"/>
-          </a:fillRef>
-          <a:effectRef idx="2">
-            <a:schemeClr val="accent1"/>
-          </a:effectRef>
-          <a:fontRef idx="minor">
-            <a:schemeClr val="lt1"/>
-          </a:fontRef>
-        </p:style>
-        <p:txBody>
-          <a:bodyPr rtlCol="0" anchor="ctr"/>
-          <a:lstStyle/>
-          <a:p>
             <a:pPr algn="ctr"/>
-          </a:p>
-        </p:txBody>
-      </p:sp>
-      <p:sp>
-        <p:nvSpPr>
-          <p:cNvPr id="6" name="build:ghost"/>
-          <p:cNvSpPr txBox="1"/>
-          <p:nvPr/>
-        </p:nvSpPr>
-        <p:spPr>
-          <a:xfrm>
-            <a:off x="566928" y="3237039"/>
-            <a:ext cx="11057839" cy="254000"/>
-          </a:xfrm>
-          <a:prstGeom prst="rect">
-            <a:avLst/>
-          </a:prstGeom>
-          <a:noFill/>
-        </p:spPr>
-        <p:txBody>
-          <a:bodyPr wrap="none" lIns="0" rIns="0" tIns="0" bIns="0">
-            <a:noAutofit/>
-          </a:bodyPr>
-          <a:lstStyle/>
-          <a:p>
-            <a:r>
-              <a:rPr sz="1600" b="1">
-                <a:solidFill>
-                  <a:srgbClr val="C1C9C5"/>
-                </a:solidFill>
-                <a:latin typeface="Avenir Next"/>
-                <a:ea typeface="Hiragino Sans"/>
-                <a:cs typeface="Hiragino Sans"/>
-              </a:rPr>
-              <a:t>② 捨てた項が次の誤差｜e_{n+1} ≈ (f″/2f′) e_n²</a:t>
-            </a:r>
-          </a:p>
-        </p:txBody>
-      </p:sp>
-      <p:sp>
-        <p:nvSpPr>
-          <p:cNvPr id="7" name="build:ghost"/>
-          <p:cNvSpPr txBox="1"/>
-          <p:nvPr/>
-        </p:nvSpPr>
-        <p:spPr>
-          <a:xfrm>
-            <a:off x="822960" y="3529139"/>
-            <a:ext cx="10801807" cy="695325"/>
-          </a:xfrm>
-          <a:prstGeom prst="rect">
-            <a:avLst/>
-          </a:prstGeom>
-          <a:noFill/>
-        </p:spPr>
-        <p:txBody>
-          <a:bodyPr wrap="square" lIns="0" rIns="0" tIns="0" bIns="0">
-            <a:noAutofit/>
-          </a:bodyPr>
-          <a:lstStyle/>
-          <a:p>
-            <a:pPr>
-              <a:lnSpc>
-                <a:spcPct val="130000"/>
-              </a:lnSpc>
-            </a:pPr>
-            <a:r>
-              <a:rPr sz="1500">
-                <a:solidFill>
-                  <a:srgbClr val="C1BCBB"/>
-                </a:solidFill>
-                <a:latin typeface="Avenir Next"/>
-                <a:ea typeface="Hiragino Sans"/>
-                <a:cs typeface="Hiragino Sans"/>
-              </a:rPr>
-              <a:t>真の解 x* で f(x*) = 0 を展開すると、1 次の項は接線で消え、残るのは </a:t>
-            </a:r>
-            <a:r>
-              <a:rPr sz="1500" b="1">
-                <a:solidFill>
-                  <a:srgbClr val="C1BCBB"/>
-                </a:solidFill>
-                <a:latin typeface="Avenir Next"/>
-                <a:ea typeface="Hiragino Sans"/>
-                <a:cs typeface="Hiragino Sans"/>
-              </a:rPr>
-              <a:t>e_n² に比例する項</a:t>
-            </a:r>
-            <a:r>
-              <a:rPr sz="1500">
-                <a:solidFill>
-                  <a:srgbClr val="C1BCBB"/>
-                </a:solidFill>
-                <a:latin typeface="Avenir Next"/>
-                <a:ea typeface="Hiragino Sans"/>
-                <a:cs typeface="Hiragino Sans"/>
-              </a:rPr>
-              <a:t> だけ。今の誤差が 10⁻² なら次は 10⁻⁴ のオーダー。</a:t>
-            </a:r>
-          </a:p>
-        </p:txBody>
-      </p:sp>
-      <p:sp>
-        <p:nvSpPr>
-          <p:cNvPr id="8" name="Rectangle 7"/>
-          <p:cNvSpPr/>
-          <p:nvPr/>
-        </p:nvSpPr>
-        <p:spPr>
-          <a:xfrm>
-            <a:off x="566928" y="4376356"/>
-            <a:ext cx="11057839" cy="9525"/>
-          </a:xfrm>
-          <a:prstGeom prst="rect">
-            <a:avLst/>
-          </a:prstGeom>
-          <a:solidFill>
-            <a:srgbClr val="E5DCCE"/>
-          </a:solidFill>
-          <a:ln>
-            <a:noFill/>
-          </a:ln>
-          <a:effectLst/>
-        </p:spPr>
-        <p:style>
-          <a:lnRef idx="1">
-            <a:schemeClr val="accent1"/>
-          </a:lnRef>
-          <a:fillRef idx="3">
-            <a:schemeClr val="accent1"/>
-          </a:fillRef>
-          <a:effectRef idx="2">
-            <a:schemeClr val="accent1"/>
-          </a:effectRef>
-          <a:fontRef idx="minor">
-            <a:schemeClr val="lt1"/>
-          </a:fontRef>
-        </p:style>
-        <p:txBody>
-          <a:bodyPr rtlCol="0" anchor="ctr"/>
-          <a:lstStyle/>
-          <a:p>
-            <a:pPr algn="ctr"/>
-          </a:p>
-        </p:txBody>
-      </p:sp>
-      <p:sp>
-        <p:nvSpPr>
-          <p:cNvPr id="9" name="build:ghost"/>
-          <p:cNvSpPr txBox="1"/>
-          <p:nvPr/>
-        </p:nvSpPr>
-        <p:spPr>
-          <a:xfrm>
-            <a:off x="566928" y="4553648"/>
-            <a:ext cx="11057839" cy="254000"/>
-          </a:xfrm>
-          <a:prstGeom prst="rect">
-            <a:avLst/>
-          </a:prstGeom>
-          <a:noFill/>
-        </p:spPr>
-        <p:txBody>
-          <a:bodyPr wrap="none" lIns="0" rIns="0" tIns="0" bIns="0">
-            <a:noAutofit/>
-          </a:bodyPr>
-          <a:lstStyle/>
-          <a:p>
-            <a:r>
-              <a:rPr sz="1600" b="1">
-                <a:solidFill>
-                  <a:srgbClr val="C1C9C5"/>
-                </a:solidFill>
-                <a:latin typeface="Avenir Next"/>
-                <a:ea typeface="Hiragino Sans"/>
-                <a:cs typeface="Hiragino Sans"/>
-              </a:rPr>
-              <a:t>③ 桁が倍々｜1 → 2 → 4 → 8 → 16 桁</a:t>
-            </a:r>
-          </a:p>
-        </p:txBody>
-      </p:sp>
-      <p:sp>
-        <p:nvSpPr>
-          <p:cNvPr id="10" name="build:ghost"/>
-          <p:cNvSpPr txBox="1"/>
-          <p:nvPr/>
-        </p:nvSpPr>
-        <p:spPr>
-          <a:xfrm>
-            <a:off x="822960" y="4845748"/>
-            <a:ext cx="10801807" cy="385762"/>
-          </a:xfrm>
-          <a:prstGeom prst="rect">
-            <a:avLst/>
-          </a:prstGeom>
-          <a:noFill/>
-        </p:spPr>
-        <p:txBody>
-          <a:bodyPr wrap="square" lIns="0" rIns="0" tIns="0" bIns="0">
-            <a:noAutofit/>
-          </a:bodyPr>
-          <a:lstStyle/>
-          <a:p>
-            <a:pPr>
-              <a:lnSpc>
-                <a:spcPct val="130000"/>
-              </a:lnSpc>
-            </a:pPr>
-            <a:r>
-              <a:rPr sz="1500">
-                <a:solidFill>
-                  <a:srgbClr val="C1BCBB"/>
-                </a:solidFill>
-                <a:latin typeface="Avenir Next"/>
-                <a:ea typeface="Hiragino Sans"/>
-                <a:cs typeface="Hiragino Sans"/>
-              </a:rPr>
-              <a:t>10⁻⁸ に届くのに 4 回。10⁻¹⁶ でも 5 回。</a:t>
-            </a:r>
-            <a:r>
-              <a:rPr sz="1500" b="1">
-                <a:solidFill>
-                  <a:srgbClr val="C1BCBB"/>
-                </a:solidFill>
-                <a:latin typeface="Avenir Next"/>
-                <a:ea typeface="Hiragino Sans"/>
-                <a:cs typeface="Hiragino Sans"/>
-              </a:rPr>
-              <a:t>系統の母線数は式に出てこない</a:t>
-            </a:r>
-            <a:r>
-              <a:rPr sz="1500">
-                <a:solidFill>
-                  <a:srgbClr val="C1BCBB"/>
-                </a:solidFill>
-                <a:latin typeface="Avenir Next"/>
-                <a:ea typeface="Hiragino Sans"/>
-                <a:cs typeface="Hiragino Sans"/>
-              </a:rPr>
-              <a:t>ので、規模によらず 3〜5 回で収束する。</a:t>
-            </a:r>
-          </a:p>
-        </p:txBody>
-      </p:sp>
-      <p:sp>
-        <p:nvSpPr>
-          <p:cNvPr id="11" name="TextBox 10"/>
+            <a:r>
+              <a:rPr sz="1400">
+                <a:solidFill>
+                  <a:srgbClr val="71635B"/>
+                </a:solidFill>
+                <a:latin typeface="Avenir Next"/>
+                <a:ea typeface="Hiragino Sans"/>
+                <a:cs typeface="Hiragino Sans"/>
+              </a:rPr>
+              <a:t>2 次以降を捨てると f′(x) Δx = −f(x)。多変数では f′ が行列 J になり、JΔx = −f(x) が修正方程式。　出典｜コード/fig_ch05.py</a:t>
+            </a:r>
+          </a:p>
+        </p:txBody>
+      </p:sp>
+      <p:sp>
+        <p:nvSpPr>
+          <p:cNvPr id="5" name="TextBox 4"/>
           <p:cNvSpPr txBox="1"/>
           <p:nvPr/>
         </p:nvSpPr>
